--- a/資料.pptx
+++ b/資料.pptx
@@ -104,6 +104,11 @@
       </a:defRPr>
     </a:lvl9pPr>
   </p:defaultTextStyle>
+  <p:extLst>
+    <p:ext uri="{EFAFB233-063F-42B5-8137-9DF3F51BA10A}">
+      <p15:sldGuideLst xmlns:p15="http://schemas.microsoft.com/office/powerpoint/2012/main"/>
+    </p:ext>
+  </p:extLst>
 </p:presentation>
 </file>
 
@@ -254,7 +259,7 @@
           <a:p>
             <a:fld id="{57469CB9-C5FC-48E3-907F-696D9C05A3CB}" type="datetimeFigureOut">
               <a:rPr kumimoji="1" lang="ja-JP" altLang="en-US" smtClean="0"/>
-              <a:t>2026/6/12</a:t>
+              <a:t>2026/7/1</a:t>
             </a:fld>
             <a:endParaRPr kumimoji="1" lang="ja-JP" altLang="en-US"/>
           </a:p>
@@ -484,7 +489,7 @@
           <a:p>
             <a:fld id="{57469CB9-C5FC-48E3-907F-696D9C05A3CB}" type="datetimeFigureOut">
               <a:rPr kumimoji="1" lang="ja-JP" altLang="en-US" smtClean="0"/>
-              <a:t>2026/6/12</a:t>
+              <a:t>2026/7/1</a:t>
             </a:fld>
             <a:endParaRPr kumimoji="1" lang="ja-JP" altLang="en-US"/>
           </a:p>
@@ -724,7 +729,7 @@
           <a:p>
             <a:fld id="{57469CB9-C5FC-48E3-907F-696D9C05A3CB}" type="datetimeFigureOut">
               <a:rPr kumimoji="1" lang="ja-JP" altLang="en-US" smtClean="0"/>
-              <a:t>2026/6/12</a:t>
+              <a:t>2026/7/1</a:t>
             </a:fld>
             <a:endParaRPr kumimoji="1" lang="ja-JP" altLang="en-US"/>
           </a:p>
@@ -954,7 +959,7 @@
           <a:p>
             <a:fld id="{57469CB9-C5FC-48E3-907F-696D9C05A3CB}" type="datetimeFigureOut">
               <a:rPr kumimoji="1" lang="ja-JP" altLang="en-US" smtClean="0"/>
-              <a:t>2026/6/12</a:t>
+              <a:t>2026/7/1</a:t>
             </a:fld>
             <a:endParaRPr kumimoji="1" lang="ja-JP" altLang="en-US"/>
           </a:p>
@@ -1229,7 +1234,7 @@
           <a:p>
             <a:fld id="{57469CB9-C5FC-48E3-907F-696D9C05A3CB}" type="datetimeFigureOut">
               <a:rPr kumimoji="1" lang="ja-JP" altLang="en-US" smtClean="0"/>
-              <a:t>2026/6/12</a:t>
+              <a:t>2026/7/1</a:t>
             </a:fld>
             <a:endParaRPr kumimoji="1" lang="ja-JP" altLang="en-US"/>
           </a:p>
@@ -1558,7 +1563,7 @@
           <a:p>
             <a:fld id="{57469CB9-C5FC-48E3-907F-696D9C05A3CB}" type="datetimeFigureOut">
               <a:rPr kumimoji="1" lang="ja-JP" altLang="en-US" smtClean="0"/>
-              <a:t>2026/6/12</a:t>
+              <a:t>2026/7/1</a:t>
             </a:fld>
             <a:endParaRPr kumimoji="1" lang="ja-JP" altLang="en-US"/>
           </a:p>
@@ -2034,7 +2039,7 @@
           <a:p>
             <a:fld id="{57469CB9-C5FC-48E3-907F-696D9C05A3CB}" type="datetimeFigureOut">
               <a:rPr kumimoji="1" lang="ja-JP" altLang="en-US" smtClean="0"/>
-              <a:t>2026/6/12</a:t>
+              <a:t>2026/7/1</a:t>
             </a:fld>
             <a:endParaRPr kumimoji="1" lang="ja-JP" altLang="en-US"/>
           </a:p>
@@ -2175,7 +2180,7 @@
           <a:p>
             <a:fld id="{57469CB9-C5FC-48E3-907F-696D9C05A3CB}" type="datetimeFigureOut">
               <a:rPr kumimoji="1" lang="ja-JP" altLang="en-US" smtClean="0"/>
-              <a:t>2026/6/12</a:t>
+              <a:t>2026/7/1</a:t>
             </a:fld>
             <a:endParaRPr kumimoji="1" lang="ja-JP" altLang="en-US"/>
           </a:p>
@@ -2288,7 +2293,7 @@
           <a:p>
             <a:fld id="{57469CB9-C5FC-48E3-907F-696D9C05A3CB}" type="datetimeFigureOut">
               <a:rPr kumimoji="1" lang="ja-JP" altLang="en-US" smtClean="0"/>
-              <a:t>2026/6/12</a:t>
+              <a:t>2026/7/1</a:t>
             </a:fld>
             <a:endParaRPr kumimoji="1" lang="ja-JP" altLang="en-US"/>
           </a:p>
@@ -2631,7 +2636,7 @@
           <a:p>
             <a:fld id="{57469CB9-C5FC-48E3-907F-696D9C05A3CB}" type="datetimeFigureOut">
               <a:rPr kumimoji="1" lang="ja-JP" altLang="en-US" smtClean="0"/>
-              <a:t>2026/6/12</a:t>
+              <a:t>2026/7/1</a:t>
             </a:fld>
             <a:endParaRPr kumimoji="1" lang="ja-JP" altLang="en-US"/>
           </a:p>
@@ -2919,7 +2924,7 @@
           <a:p>
             <a:fld id="{57469CB9-C5FC-48E3-907F-696D9C05A3CB}" type="datetimeFigureOut">
               <a:rPr kumimoji="1" lang="ja-JP" altLang="en-US" smtClean="0"/>
-              <a:t>2026/6/12</a:t>
+              <a:t>2026/7/1</a:t>
             </a:fld>
             <a:endParaRPr kumimoji="1" lang="ja-JP" altLang="en-US"/>
           </a:p>
@@ -3192,7 +3197,7 @@
           <a:p>
             <a:fld id="{57469CB9-C5FC-48E3-907F-696D9C05A3CB}" type="datetimeFigureOut">
               <a:rPr kumimoji="1" lang="ja-JP" altLang="en-US" smtClean="0"/>
-              <a:t>2026/6/12</a:t>
+              <a:t>2026/7/1</a:t>
             </a:fld>
             <a:endParaRPr kumimoji="1" lang="ja-JP" altLang="en-US"/>
           </a:p>
@@ -3609,2671 +3614,42 @@
           <a:chExt cx="0" cy="0"/>
         </a:xfrm>
       </p:grpSpPr>
-      <p:sp>
-        <p:nvSpPr>
-          <p:cNvPr id="8" name="フリーフォーム: 図形 7">
-            <a:extLst>
-              <a:ext uri="{FF2B5EF4-FFF2-40B4-BE49-F238E27FC236}">
-                <a16:creationId xmlns:a16="http://schemas.microsoft.com/office/drawing/2014/main" id="{EB9BC380-F337-7A41-DE64-FE79D9948741}"/>
-              </a:ext>
-            </a:extLst>
-          </p:cNvPr>
-          <p:cNvSpPr/>
+      <p:pic>
+        <p:nvPicPr>
+          <p:cNvPr id="3" name="グラフィックス 2">
+            <a:extLst>
+              <a:ext uri="{FF2B5EF4-FFF2-40B4-BE49-F238E27FC236}">
+                <a16:creationId xmlns:a16="http://schemas.microsoft.com/office/drawing/2014/main" id="{027753F3-4D3C-5177-B613-C430DBC1D3EA}"/>
+              </a:ext>
+            </a:extLst>
+          </p:cNvPr>
+          <p:cNvPicPr>
+            <a:picLocks noChangeAspect="1"/>
+          </p:cNvPicPr>
           <p:nvPr/>
-        </p:nvSpPr>
+        </p:nvPicPr>
+        <p:blipFill>
+          <a:blip>
+            <a:extLst>
+              <a:ext uri="{96DAC541-7B7A-43D3-8B79-37D633B846F1}">
+                <asvg:svgBlip xmlns:asvg="http://schemas.microsoft.com/office/drawing/2016/SVG/main" r:embed="rId2"/>
+              </a:ext>
+            </a:extLst>
+          </a:blip>
+          <a:stretch>
+            <a:fillRect/>
+          </a:stretch>
+        </p:blipFill>
         <p:spPr>
           <a:xfrm>
-            <a:off x="4204744" y="3455204"/>
-            <a:ext cx="4003195" cy="316800"/>
+            <a:off x="5105400" y="3319462"/>
+            <a:ext cx="1981200" cy="219075"/>
           </a:xfrm>
-          <a:custGeom>
+          <a:prstGeom prst="rect">
             <a:avLst/>
-            <a:gdLst>
-              <a:gd name="connsiteX0" fmla="*/ 3664908 w 4003195"/>
-              <a:gd name="connsiteY0" fmla="*/ -129 h 316800"/>
-              <a:gd name="connsiteX1" fmla="*/ 3664908 w 4003195"/>
-              <a:gd name="connsiteY1" fmla="*/ 8871 h 316800"/>
-              <a:gd name="connsiteX2" fmla="*/ 113 w 4003195"/>
-              <a:gd name="connsiteY2" fmla="*/ 8871 h 316800"/>
-              <a:gd name="connsiteX3" fmla="*/ 113 w 4003195"/>
-              <a:gd name="connsiteY3" fmla="*/ 138470 h 316800"/>
-              <a:gd name="connsiteX4" fmla="*/ 3664908 w 4003195"/>
-              <a:gd name="connsiteY4" fmla="*/ 138470 h 316800"/>
-              <a:gd name="connsiteX5" fmla="*/ 3664908 w 4003195"/>
-              <a:gd name="connsiteY5" fmla="*/ 147470 h 316800"/>
-              <a:gd name="connsiteX6" fmla="*/ 3765708 w 4003195"/>
-              <a:gd name="connsiteY6" fmla="*/ 147470 h 316800"/>
-              <a:gd name="connsiteX7" fmla="*/ 3765708 w 4003195"/>
-              <a:gd name="connsiteY7" fmla="*/ 316671 h 316800"/>
-              <a:gd name="connsiteX8" fmla="*/ 3913309 w 4003195"/>
-              <a:gd name="connsiteY8" fmla="*/ 316671 h 316800"/>
-              <a:gd name="connsiteX9" fmla="*/ 3913309 w 4003195"/>
-              <a:gd name="connsiteY9" fmla="*/ 147470 h 316800"/>
-              <a:gd name="connsiteX10" fmla="*/ 4003309 w 4003195"/>
-              <a:gd name="connsiteY10" fmla="*/ 147470 h 316800"/>
-              <a:gd name="connsiteX11" fmla="*/ 4003309 w 4003195"/>
-              <a:gd name="connsiteY11" fmla="*/ -129 h 316800"/>
-            </a:gdLst>
-            <a:ahLst/>
-            <a:cxnLst>
-              <a:cxn ang="0">
-                <a:pos x="connsiteX0" y="connsiteY0"/>
-              </a:cxn>
-              <a:cxn ang="0">
-                <a:pos x="connsiteX1" y="connsiteY1"/>
-              </a:cxn>
-              <a:cxn ang="0">
-                <a:pos x="connsiteX2" y="connsiteY2"/>
-              </a:cxn>
-              <a:cxn ang="0">
-                <a:pos x="connsiteX3" y="connsiteY3"/>
-              </a:cxn>
-              <a:cxn ang="0">
-                <a:pos x="connsiteX4" y="connsiteY4"/>
-              </a:cxn>
-              <a:cxn ang="0">
-                <a:pos x="connsiteX5" y="connsiteY5"/>
-              </a:cxn>
-              <a:cxn ang="0">
-                <a:pos x="connsiteX6" y="connsiteY6"/>
-              </a:cxn>
-              <a:cxn ang="0">
-                <a:pos x="connsiteX7" y="connsiteY7"/>
-              </a:cxn>
-              <a:cxn ang="0">
-                <a:pos x="connsiteX8" y="connsiteY8"/>
-              </a:cxn>
-              <a:cxn ang="0">
-                <a:pos x="connsiteX9" y="connsiteY9"/>
-              </a:cxn>
-              <a:cxn ang="0">
-                <a:pos x="connsiteX10" y="connsiteY10"/>
-              </a:cxn>
-              <a:cxn ang="0">
-                <a:pos x="connsiteX11" y="connsiteY11"/>
-              </a:cxn>
-            </a:cxnLst>
-            <a:rect l="l" t="t" r="r" b="b"/>
-            <a:pathLst>
-              <a:path w="4003195" h="316800">
-                <a:moveTo>
-                  <a:pt x="3664908" y="-129"/>
-                </a:moveTo>
-                <a:lnTo>
-                  <a:pt x="3664908" y="8871"/>
-                </a:lnTo>
-                <a:lnTo>
-                  <a:pt x="113" y="8871"/>
-                </a:lnTo>
-                <a:lnTo>
-                  <a:pt x="113" y="138470"/>
-                </a:lnTo>
-                <a:lnTo>
-                  <a:pt x="3664908" y="138470"/>
-                </a:lnTo>
-                <a:lnTo>
-                  <a:pt x="3664908" y="147470"/>
-                </a:lnTo>
-                <a:lnTo>
-                  <a:pt x="3765708" y="147470"/>
-                </a:lnTo>
-                <a:lnTo>
-                  <a:pt x="3765708" y="316671"/>
-                </a:lnTo>
-                <a:lnTo>
-                  <a:pt x="3913309" y="316671"/>
-                </a:lnTo>
-                <a:lnTo>
-                  <a:pt x="3913309" y="147470"/>
-                </a:lnTo>
-                <a:lnTo>
-                  <a:pt x="4003309" y="147470"/>
-                </a:lnTo>
-                <a:lnTo>
-                  <a:pt x="4003309" y="-129"/>
-                </a:lnTo>
-                <a:close/>
-              </a:path>
-            </a:pathLst>
-          </a:custGeom>
-          <a:solidFill>
-            <a:srgbClr val="000000">
-              <a:alpha val="50000"/>
-            </a:srgbClr>
-          </a:solidFill>
-          <a:ln w="3598" cap="sq">
-            <a:noFill/>
-            <a:prstDash val="solid"/>
-            <a:miter/>
-          </a:ln>
+          </a:prstGeom>
         </p:spPr>
-        <p:txBody>
-          <a:bodyPr rtlCol="0" anchor="ctr"/>
-          <a:lstStyle/>
-          <a:p>
-            <a:endParaRPr lang="ja-JP" altLang="en-US"/>
-          </a:p>
-        </p:txBody>
-      </p:sp>
-      <p:grpSp>
-        <p:nvGrpSpPr>
-          <p:cNvPr id="9" name="グラフィックス 4">
-            <a:extLst>
-              <a:ext uri="{FF2B5EF4-FFF2-40B4-BE49-F238E27FC236}">
-                <a16:creationId xmlns:a16="http://schemas.microsoft.com/office/drawing/2014/main" id="{89131C58-7A36-300E-70AE-E74F7BF32E1F}"/>
-              </a:ext>
-            </a:extLst>
-          </p:cNvPr>
-          <p:cNvGrpSpPr/>
-          <p:nvPr/>
-        </p:nvGrpSpPr>
-        <p:grpSpPr>
-          <a:xfrm>
-            <a:off x="4204741" y="3771990"/>
-            <a:ext cx="4003202" cy="531000"/>
-            <a:chOff x="4204741" y="3771990"/>
-            <a:chExt cx="4003202" cy="531000"/>
-          </a:xfrm>
-          <a:noFill/>
-        </p:grpSpPr>
-        <p:grpSp>
-          <p:nvGrpSpPr>
-            <p:cNvPr id="10" name="グラフィックス 4">
-              <a:extLst>
-                <a:ext uri="{FF2B5EF4-FFF2-40B4-BE49-F238E27FC236}">
-                  <a16:creationId xmlns:a16="http://schemas.microsoft.com/office/drawing/2014/main" id="{9A4EA54E-1416-028A-837E-5304D7865162}"/>
-                </a:ext>
-              </a:extLst>
-            </p:cNvPr>
-            <p:cNvGrpSpPr/>
-            <p:nvPr/>
-          </p:nvGrpSpPr>
-          <p:grpSpPr>
-            <a:xfrm>
-              <a:off x="4204741" y="3978990"/>
-              <a:ext cx="4003202" cy="324000"/>
-              <a:chOff x="4204741" y="3978990"/>
-              <a:chExt cx="4003202" cy="324000"/>
-            </a:xfrm>
-            <a:noFill/>
-          </p:grpSpPr>
-          <p:sp>
-            <p:nvSpPr>
-              <p:cNvPr id="11" name="フリーフォーム: 図形 10">
-                <a:extLst>
-                  <a:ext uri="{FF2B5EF4-FFF2-40B4-BE49-F238E27FC236}">
-                    <a16:creationId xmlns:a16="http://schemas.microsoft.com/office/drawing/2014/main" id="{D968A95D-6243-3883-FA15-CFD39E6AE793}"/>
-                  </a:ext>
-                </a:extLst>
-              </p:cNvPr>
-              <p:cNvSpPr/>
-              <p:nvPr/>
-            </p:nvSpPr>
-            <p:spPr>
-              <a:xfrm>
-                <a:off x="7869543" y="3978990"/>
-                <a:ext cx="338400" cy="324000"/>
-              </a:xfrm>
-              <a:custGeom>
-                <a:avLst/>
-                <a:gdLst>
-                  <a:gd name="connsiteX0" fmla="*/ 254 w 338400"/>
-                  <a:gd name="connsiteY0" fmla="*/ -74 h 324000"/>
-                  <a:gd name="connsiteX1" fmla="*/ 254 w 338400"/>
-                  <a:gd name="connsiteY1" fmla="*/ 161926 h 324000"/>
-                  <a:gd name="connsiteX2" fmla="*/ 93855 w 338400"/>
-                  <a:gd name="connsiteY2" fmla="*/ 161926 h 324000"/>
-                  <a:gd name="connsiteX3" fmla="*/ 93855 w 338400"/>
-                  <a:gd name="connsiteY3" fmla="*/ 323926 h 324000"/>
-                  <a:gd name="connsiteX4" fmla="*/ 255855 w 338400"/>
-                  <a:gd name="connsiteY4" fmla="*/ 323926 h 324000"/>
-                  <a:gd name="connsiteX5" fmla="*/ 255855 w 338400"/>
-                  <a:gd name="connsiteY5" fmla="*/ 161926 h 324000"/>
-                  <a:gd name="connsiteX6" fmla="*/ 338655 w 338400"/>
-                  <a:gd name="connsiteY6" fmla="*/ 161926 h 324000"/>
-                  <a:gd name="connsiteX7" fmla="*/ 338655 w 338400"/>
-                  <a:gd name="connsiteY7" fmla="*/ -74 h 324000"/>
-                </a:gdLst>
-                <a:ahLst/>
-                <a:cxnLst>
-                  <a:cxn ang="0">
-                    <a:pos x="connsiteX0" y="connsiteY0"/>
-                  </a:cxn>
-                  <a:cxn ang="0">
-                    <a:pos x="connsiteX1" y="connsiteY1"/>
-                  </a:cxn>
-                  <a:cxn ang="0">
-                    <a:pos x="connsiteX2" y="connsiteY2"/>
-                  </a:cxn>
-                  <a:cxn ang="0">
-                    <a:pos x="connsiteX3" y="connsiteY3"/>
-                  </a:cxn>
-                  <a:cxn ang="0">
-                    <a:pos x="connsiteX4" y="connsiteY4"/>
-                  </a:cxn>
-                  <a:cxn ang="0">
-                    <a:pos x="connsiteX5" y="connsiteY5"/>
-                  </a:cxn>
-                  <a:cxn ang="0">
-                    <a:pos x="connsiteX6" y="connsiteY6"/>
-                  </a:cxn>
-                  <a:cxn ang="0">
-                    <a:pos x="connsiteX7" y="connsiteY7"/>
-                  </a:cxn>
-                </a:cxnLst>
-                <a:rect l="l" t="t" r="r" b="b"/>
-                <a:pathLst>
-                  <a:path w="338400" h="324000">
-                    <a:moveTo>
-                      <a:pt x="254" y="-74"/>
-                    </a:moveTo>
-                    <a:lnTo>
-                      <a:pt x="254" y="161926"/>
-                    </a:lnTo>
-                    <a:lnTo>
-                      <a:pt x="93855" y="161926"/>
-                    </a:lnTo>
-                    <a:lnTo>
-                      <a:pt x="93855" y="323926"/>
-                    </a:lnTo>
-                    <a:lnTo>
-                      <a:pt x="255855" y="323926"/>
-                    </a:lnTo>
-                    <a:lnTo>
-                      <a:pt x="255855" y="161926"/>
-                    </a:lnTo>
-                    <a:lnTo>
-                      <a:pt x="338655" y="161926"/>
-                    </a:lnTo>
-                    <a:lnTo>
-                      <a:pt x="338655" y="-74"/>
-                    </a:lnTo>
-                    <a:close/>
-                  </a:path>
-                </a:pathLst>
-              </a:custGeom>
-              <a:noFill/>
-              <a:ln w="3598" cap="sq">
-                <a:solidFill>
-                  <a:srgbClr val="000000"/>
-                </a:solidFill>
-                <a:prstDash val="solid"/>
-                <a:miter/>
-              </a:ln>
-            </p:spPr>
-            <p:txBody>
-              <a:bodyPr rtlCol="0" anchor="ctr"/>
-              <a:lstStyle/>
-              <a:p>
-                <a:endParaRPr lang="ja-JP" altLang="en-US"/>
-              </a:p>
-            </p:txBody>
-          </p:sp>
-          <p:sp>
-            <p:nvSpPr>
-              <p:cNvPr id="12" name="フリーフォーム: 図形 11">
-                <a:extLst>
-                  <a:ext uri="{FF2B5EF4-FFF2-40B4-BE49-F238E27FC236}">
-                    <a16:creationId xmlns:a16="http://schemas.microsoft.com/office/drawing/2014/main" id="{96D6CEE0-13CA-3CD2-F029-A7345FE7C216}"/>
-                  </a:ext>
-                </a:extLst>
-              </p:cNvPr>
-              <p:cNvSpPr/>
-              <p:nvPr/>
-            </p:nvSpPr>
-            <p:spPr>
-              <a:xfrm>
-                <a:off x="4204741" y="3987990"/>
-                <a:ext cx="3664802" cy="144000"/>
-              </a:xfrm>
-              <a:custGeom>
-                <a:avLst/>
-                <a:gdLst>
-                  <a:gd name="connsiteX0" fmla="*/ 100 w 3664802"/>
-                  <a:gd name="connsiteY0" fmla="*/ -80 h 144000"/>
-                  <a:gd name="connsiteX1" fmla="*/ 3664902 w 3664802"/>
-                  <a:gd name="connsiteY1" fmla="*/ -80 h 144000"/>
-                  <a:gd name="connsiteX2" fmla="*/ 3664902 w 3664802"/>
-                  <a:gd name="connsiteY2" fmla="*/ 143920 h 144000"/>
-                  <a:gd name="connsiteX3" fmla="*/ 100 w 3664802"/>
-                  <a:gd name="connsiteY3" fmla="*/ 143920 h 144000"/>
-                </a:gdLst>
-                <a:ahLst/>
-                <a:cxnLst>
-                  <a:cxn ang="0">
-                    <a:pos x="connsiteX0" y="connsiteY0"/>
-                  </a:cxn>
-                  <a:cxn ang="0">
-                    <a:pos x="connsiteX1" y="connsiteY1"/>
-                  </a:cxn>
-                  <a:cxn ang="0">
-                    <a:pos x="connsiteX2" y="connsiteY2"/>
-                  </a:cxn>
-                  <a:cxn ang="0">
-                    <a:pos x="connsiteX3" y="connsiteY3"/>
-                  </a:cxn>
-                </a:cxnLst>
-                <a:rect l="l" t="t" r="r" b="b"/>
-                <a:pathLst>
-                  <a:path w="3664802" h="144000">
-                    <a:moveTo>
-                      <a:pt x="100" y="-80"/>
-                    </a:moveTo>
-                    <a:lnTo>
-                      <a:pt x="3664902" y="-80"/>
-                    </a:lnTo>
-                    <a:lnTo>
-                      <a:pt x="3664902" y="143920"/>
-                    </a:lnTo>
-                    <a:lnTo>
-                      <a:pt x="100" y="143920"/>
-                    </a:lnTo>
-                    <a:close/>
-                  </a:path>
-                </a:pathLst>
-              </a:custGeom>
-              <a:noFill/>
-              <a:ln w="3602" cap="sq">
-                <a:solidFill>
-                  <a:srgbClr val="000000"/>
-                </a:solidFill>
-                <a:prstDash val="solid"/>
-                <a:miter/>
-              </a:ln>
-            </p:spPr>
-            <p:txBody>
-              <a:bodyPr rtlCol="0" anchor="ctr"/>
-              <a:lstStyle/>
-              <a:p>
-                <a:endParaRPr lang="ja-JP" altLang="en-US"/>
-              </a:p>
-            </p:txBody>
-          </p:sp>
-        </p:grpSp>
-        <p:grpSp>
-          <p:nvGrpSpPr>
-            <p:cNvPr id="13" name="グラフィックス 4">
-              <a:extLst>
-                <a:ext uri="{FF2B5EF4-FFF2-40B4-BE49-F238E27FC236}">
-                  <a16:creationId xmlns:a16="http://schemas.microsoft.com/office/drawing/2014/main" id="{67665729-B7B7-ACAA-581A-FC9FC06DED89}"/>
-                </a:ext>
-              </a:extLst>
-            </p:cNvPr>
-            <p:cNvGrpSpPr/>
-            <p:nvPr/>
-          </p:nvGrpSpPr>
-          <p:grpSpPr>
-            <a:xfrm>
-              <a:off x="6098342" y="3926790"/>
-              <a:ext cx="385200" cy="208800"/>
-              <a:chOff x="6098342" y="3926790"/>
-              <a:chExt cx="385200" cy="208800"/>
-            </a:xfrm>
-            <a:noFill/>
-          </p:grpSpPr>
-          <p:sp>
-            <p:nvSpPr>
-              <p:cNvPr id="14" name="フリーフォーム: 図形 13">
-                <a:extLst>
-                  <a:ext uri="{FF2B5EF4-FFF2-40B4-BE49-F238E27FC236}">
-                    <a16:creationId xmlns:a16="http://schemas.microsoft.com/office/drawing/2014/main" id="{38137F8E-779F-6836-5274-358E184C1A10}"/>
-                  </a:ext>
-                </a:extLst>
-              </p:cNvPr>
-              <p:cNvSpPr/>
-              <p:nvPr/>
-            </p:nvSpPr>
-            <p:spPr>
-              <a:xfrm>
-                <a:off x="6170342" y="3984390"/>
-                <a:ext cx="90000" cy="151199"/>
-              </a:xfrm>
-              <a:custGeom>
-                <a:avLst/>
-                <a:gdLst>
-                  <a:gd name="connsiteX0" fmla="*/ 114 w 90000"/>
-                  <a:gd name="connsiteY0" fmla="*/ 151120 h 151199"/>
-                  <a:gd name="connsiteX1" fmla="*/ 90114 w 90000"/>
-                  <a:gd name="connsiteY1" fmla="*/ 151120 h 151199"/>
-                  <a:gd name="connsiteX2" fmla="*/ 90114 w 90000"/>
-                  <a:gd name="connsiteY2" fmla="*/ -80 h 151199"/>
-                  <a:gd name="connsiteX3" fmla="*/ 114 w 90000"/>
-                  <a:gd name="connsiteY3" fmla="*/ -80 h 151199"/>
-                </a:gdLst>
-                <a:ahLst/>
-                <a:cxnLst>
-                  <a:cxn ang="0">
-                    <a:pos x="connsiteX0" y="connsiteY0"/>
-                  </a:cxn>
-                  <a:cxn ang="0">
-                    <a:pos x="connsiteX1" y="connsiteY1"/>
-                  </a:cxn>
-                  <a:cxn ang="0">
-                    <a:pos x="connsiteX2" y="connsiteY2"/>
-                  </a:cxn>
-                  <a:cxn ang="0">
-                    <a:pos x="connsiteX3" y="connsiteY3"/>
-                  </a:cxn>
-                </a:cxnLst>
-                <a:rect l="l" t="t" r="r" b="b"/>
-                <a:pathLst>
-                  <a:path w="90000" h="151199">
-                    <a:moveTo>
-                      <a:pt x="114" y="151120"/>
-                    </a:moveTo>
-                    <a:lnTo>
-                      <a:pt x="90114" y="151120"/>
-                    </a:lnTo>
-                    <a:lnTo>
-                      <a:pt x="90114" y="-80"/>
-                    </a:lnTo>
-                    <a:lnTo>
-                      <a:pt x="114" y="-80"/>
-                    </a:lnTo>
-                    <a:close/>
-                  </a:path>
-                </a:pathLst>
-              </a:custGeom>
-              <a:noFill/>
-              <a:ln w="3598" cap="sq">
-                <a:solidFill>
-                  <a:srgbClr val="000000"/>
-                </a:solidFill>
-                <a:prstDash val="solid"/>
-                <a:miter/>
-              </a:ln>
-            </p:spPr>
-            <p:txBody>
-              <a:bodyPr rtlCol="0" anchor="ctr"/>
-              <a:lstStyle/>
-              <a:p>
-                <a:endParaRPr lang="ja-JP" altLang="en-US"/>
-              </a:p>
-            </p:txBody>
-          </p:sp>
-          <p:grpSp>
-            <p:nvGrpSpPr>
-              <p:cNvPr id="15" name="グラフィックス 4">
-                <a:extLst>
-                  <a:ext uri="{FF2B5EF4-FFF2-40B4-BE49-F238E27FC236}">
-                    <a16:creationId xmlns:a16="http://schemas.microsoft.com/office/drawing/2014/main" id="{5FF2A991-3F83-049F-3A0B-27B0C961536C}"/>
-                  </a:ext>
-                </a:extLst>
-              </p:cNvPr>
-              <p:cNvGrpSpPr/>
-              <p:nvPr/>
-            </p:nvGrpSpPr>
-            <p:grpSpPr>
-              <a:xfrm>
-                <a:off x="6098342" y="3926790"/>
-                <a:ext cx="385200" cy="57600"/>
-                <a:chOff x="6098342" y="3926790"/>
-                <a:chExt cx="385200" cy="57600"/>
-              </a:xfrm>
-              <a:noFill/>
-            </p:grpSpPr>
-            <p:sp>
-              <p:nvSpPr>
-                <p:cNvPr id="16" name="フリーフォーム: 図形 15">
-                  <a:extLst>
-                    <a:ext uri="{FF2B5EF4-FFF2-40B4-BE49-F238E27FC236}">
-                      <a16:creationId xmlns:a16="http://schemas.microsoft.com/office/drawing/2014/main" id="{FD82D27B-096E-CAC4-2DEC-BFDF276D6092}"/>
-                    </a:ext>
-                  </a:extLst>
-                </p:cNvPr>
-                <p:cNvSpPr/>
-                <p:nvPr/>
-              </p:nvSpPr>
-              <p:spPr>
-                <a:xfrm>
-                  <a:off x="6098342" y="3926790"/>
-                  <a:ext cx="72000" cy="57600"/>
-                </a:xfrm>
-                <a:custGeom>
-                  <a:avLst/>
-                  <a:gdLst>
-                    <a:gd name="connsiteX0" fmla="*/ 72107 w 72000"/>
-                    <a:gd name="connsiteY0" fmla="*/ -88 h 57600"/>
-                    <a:gd name="connsiteX1" fmla="*/ 107 w 72000"/>
-                    <a:gd name="connsiteY1" fmla="*/ -88 h 57600"/>
-                    <a:gd name="connsiteX2" fmla="*/ 107 w 72000"/>
-                    <a:gd name="connsiteY2" fmla="*/ 57512 h 57600"/>
-                    <a:gd name="connsiteX3" fmla="*/ 72107 w 72000"/>
-                    <a:gd name="connsiteY3" fmla="*/ 57512 h 57600"/>
-                  </a:gdLst>
-                  <a:ahLst/>
-                  <a:cxnLst>
-                    <a:cxn ang="0">
-                      <a:pos x="connsiteX0" y="connsiteY0"/>
-                    </a:cxn>
-                    <a:cxn ang="0">
-                      <a:pos x="connsiteX1" y="connsiteY1"/>
-                    </a:cxn>
-                    <a:cxn ang="0">
-                      <a:pos x="connsiteX2" y="connsiteY2"/>
-                    </a:cxn>
-                    <a:cxn ang="0">
-                      <a:pos x="connsiteX3" y="connsiteY3"/>
-                    </a:cxn>
-                  </a:cxnLst>
-                  <a:rect l="l" t="t" r="r" b="b"/>
-                  <a:pathLst>
-                    <a:path w="72000" h="57600">
-                      <a:moveTo>
-                        <a:pt x="72107" y="-88"/>
-                      </a:moveTo>
-                      <a:lnTo>
-                        <a:pt x="107" y="-88"/>
-                      </a:lnTo>
-                      <a:lnTo>
-                        <a:pt x="107" y="57512"/>
-                      </a:lnTo>
-                      <a:lnTo>
-                        <a:pt x="72107" y="57512"/>
-                      </a:lnTo>
-                      <a:close/>
-                    </a:path>
-                  </a:pathLst>
-                </a:custGeom>
-                <a:noFill/>
-                <a:ln w="3598" cap="sq">
-                  <a:solidFill>
-                    <a:srgbClr val="000000"/>
-                  </a:solidFill>
-                  <a:prstDash val="solid"/>
-                  <a:miter/>
-                </a:ln>
-              </p:spPr>
-              <p:txBody>
-                <a:bodyPr rtlCol="0" anchor="ctr"/>
-                <a:lstStyle/>
-                <a:p>
-                  <a:endParaRPr lang="ja-JP" altLang="en-US"/>
-                </a:p>
-              </p:txBody>
-            </p:sp>
-            <p:sp>
-              <p:nvSpPr>
-                <p:cNvPr id="17" name="フリーフォーム: 図形 16">
-                  <a:extLst>
-                    <a:ext uri="{FF2B5EF4-FFF2-40B4-BE49-F238E27FC236}">
-                      <a16:creationId xmlns:a16="http://schemas.microsoft.com/office/drawing/2014/main" id="{6EAA6FB4-19A8-23F4-FCD1-CE7C9B1877FE}"/>
-                    </a:ext>
-                  </a:extLst>
-                </p:cNvPr>
-                <p:cNvSpPr/>
-                <p:nvPr/>
-              </p:nvSpPr>
-              <p:spPr>
-                <a:xfrm>
-                  <a:off x="6177542" y="3926790"/>
-                  <a:ext cx="237600" cy="57600"/>
-                </a:xfrm>
-                <a:custGeom>
-                  <a:avLst/>
-                  <a:gdLst>
-                    <a:gd name="connsiteX0" fmla="*/ 237720 w 237600"/>
-                    <a:gd name="connsiteY0" fmla="*/ -88 h 57600"/>
-                    <a:gd name="connsiteX1" fmla="*/ 120 w 237600"/>
-                    <a:gd name="connsiteY1" fmla="*/ -88 h 57600"/>
-                    <a:gd name="connsiteX2" fmla="*/ 120 w 237600"/>
-                    <a:gd name="connsiteY2" fmla="*/ 57512 h 57600"/>
-                    <a:gd name="connsiteX3" fmla="*/ 237720 w 237600"/>
-                    <a:gd name="connsiteY3" fmla="*/ 57512 h 57600"/>
-                  </a:gdLst>
-                  <a:ahLst/>
-                  <a:cxnLst>
-                    <a:cxn ang="0">
-                      <a:pos x="connsiteX0" y="connsiteY0"/>
-                    </a:cxn>
-                    <a:cxn ang="0">
-                      <a:pos x="connsiteX1" y="connsiteY1"/>
-                    </a:cxn>
-                    <a:cxn ang="0">
-                      <a:pos x="connsiteX2" y="connsiteY2"/>
-                    </a:cxn>
-                    <a:cxn ang="0">
-                      <a:pos x="connsiteX3" y="connsiteY3"/>
-                    </a:cxn>
-                  </a:cxnLst>
-                  <a:rect l="l" t="t" r="r" b="b"/>
-                  <a:pathLst>
-                    <a:path w="237600" h="57600">
-                      <a:moveTo>
-                        <a:pt x="237720" y="-88"/>
-                      </a:moveTo>
-                      <a:lnTo>
-                        <a:pt x="120" y="-88"/>
-                      </a:lnTo>
-                      <a:lnTo>
-                        <a:pt x="120" y="57512"/>
-                      </a:lnTo>
-                      <a:lnTo>
-                        <a:pt x="237720" y="57512"/>
-                      </a:lnTo>
-                      <a:close/>
-                    </a:path>
-                  </a:pathLst>
-                </a:custGeom>
-                <a:noFill/>
-                <a:ln w="3598" cap="sq">
-                  <a:solidFill>
-                    <a:srgbClr val="000000"/>
-                  </a:solidFill>
-                  <a:prstDash val="solid"/>
-                  <a:miter/>
-                </a:ln>
-              </p:spPr>
-              <p:txBody>
-                <a:bodyPr rtlCol="0" anchor="ctr"/>
-                <a:lstStyle/>
-                <a:p>
-                  <a:endParaRPr lang="ja-JP" altLang="en-US"/>
-                </a:p>
-              </p:txBody>
-            </p:sp>
-            <p:sp>
-              <p:nvSpPr>
-                <p:cNvPr id="18" name="フリーフォーム: 図形 17">
-                  <a:extLst>
-                    <a:ext uri="{FF2B5EF4-FFF2-40B4-BE49-F238E27FC236}">
-                      <a16:creationId xmlns:a16="http://schemas.microsoft.com/office/drawing/2014/main" id="{2C11B340-5467-5781-210F-4D2A1DE73611}"/>
-                    </a:ext>
-                  </a:extLst>
-                </p:cNvPr>
-                <p:cNvSpPr/>
-                <p:nvPr/>
-              </p:nvSpPr>
-              <p:spPr>
-                <a:xfrm>
-                  <a:off x="6415142" y="3926790"/>
-                  <a:ext cx="21599" cy="57600"/>
-                </a:xfrm>
-                <a:custGeom>
-                  <a:avLst/>
-                  <a:gdLst>
-                    <a:gd name="connsiteX0" fmla="*/ 21730 w 21599"/>
-                    <a:gd name="connsiteY0" fmla="*/ -88 h 57600"/>
-                    <a:gd name="connsiteX1" fmla="*/ 130 w 21599"/>
-                    <a:gd name="connsiteY1" fmla="*/ -88 h 57600"/>
-                    <a:gd name="connsiteX2" fmla="*/ 130 w 21599"/>
-                    <a:gd name="connsiteY2" fmla="*/ 57512 h 57600"/>
-                    <a:gd name="connsiteX3" fmla="*/ 21730 w 21599"/>
-                    <a:gd name="connsiteY3" fmla="*/ 57512 h 57600"/>
-                  </a:gdLst>
-                  <a:ahLst/>
-                  <a:cxnLst>
-                    <a:cxn ang="0">
-                      <a:pos x="connsiteX0" y="connsiteY0"/>
-                    </a:cxn>
-                    <a:cxn ang="0">
-                      <a:pos x="connsiteX1" y="connsiteY1"/>
-                    </a:cxn>
-                    <a:cxn ang="0">
-                      <a:pos x="connsiteX2" y="connsiteY2"/>
-                    </a:cxn>
-                    <a:cxn ang="0">
-                      <a:pos x="connsiteX3" y="connsiteY3"/>
-                    </a:cxn>
-                  </a:cxnLst>
-                  <a:rect l="l" t="t" r="r" b="b"/>
-                  <a:pathLst>
-                    <a:path w="21599" h="57600">
-                      <a:moveTo>
-                        <a:pt x="21730" y="-88"/>
-                      </a:moveTo>
-                      <a:lnTo>
-                        <a:pt x="130" y="-88"/>
-                      </a:lnTo>
-                      <a:lnTo>
-                        <a:pt x="130" y="57512"/>
-                      </a:lnTo>
-                      <a:lnTo>
-                        <a:pt x="21730" y="57512"/>
-                      </a:lnTo>
-                      <a:close/>
-                    </a:path>
-                  </a:pathLst>
-                </a:custGeom>
-                <a:noFill/>
-                <a:ln w="3598" cap="sq">
-                  <a:solidFill>
-                    <a:srgbClr val="000000"/>
-                  </a:solidFill>
-                  <a:prstDash val="solid"/>
-                  <a:miter/>
-                </a:ln>
-              </p:spPr>
-              <p:txBody>
-                <a:bodyPr rtlCol="0" anchor="ctr"/>
-                <a:lstStyle/>
-                <a:p>
-                  <a:endParaRPr lang="ja-JP" altLang="en-US"/>
-                </a:p>
-              </p:txBody>
-            </p:sp>
-            <p:sp>
-              <p:nvSpPr>
-                <p:cNvPr id="19" name="フリーフォーム: 図形 18">
-                  <a:extLst>
-                    <a:ext uri="{FF2B5EF4-FFF2-40B4-BE49-F238E27FC236}">
-                      <a16:creationId xmlns:a16="http://schemas.microsoft.com/office/drawing/2014/main" id="{DA73ACC6-5F39-D1A3-0F8E-3B67B5284EAC}"/>
-                    </a:ext>
-                  </a:extLst>
-                </p:cNvPr>
-                <p:cNvSpPr/>
-                <p:nvPr/>
-              </p:nvSpPr>
-              <p:spPr>
-                <a:xfrm>
-                  <a:off x="6436742" y="3926790"/>
-                  <a:ext cx="36000" cy="57600"/>
-                </a:xfrm>
-                <a:custGeom>
-                  <a:avLst/>
-                  <a:gdLst>
-                    <a:gd name="connsiteX0" fmla="*/ 36132 w 36000"/>
-                    <a:gd name="connsiteY0" fmla="*/ -88 h 57600"/>
-                    <a:gd name="connsiteX1" fmla="*/ 132 w 36000"/>
-                    <a:gd name="connsiteY1" fmla="*/ -88 h 57600"/>
-                    <a:gd name="connsiteX2" fmla="*/ 132 w 36000"/>
-                    <a:gd name="connsiteY2" fmla="*/ 57512 h 57600"/>
-                    <a:gd name="connsiteX3" fmla="*/ 36132 w 36000"/>
-                    <a:gd name="connsiteY3" fmla="*/ 57512 h 57600"/>
-                  </a:gdLst>
-                  <a:ahLst/>
-                  <a:cxnLst>
-                    <a:cxn ang="0">
-                      <a:pos x="connsiteX0" y="connsiteY0"/>
-                    </a:cxn>
-                    <a:cxn ang="0">
-                      <a:pos x="connsiteX1" y="connsiteY1"/>
-                    </a:cxn>
-                    <a:cxn ang="0">
-                      <a:pos x="connsiteX2" y="connsiteY2"/>
-                    </a:cxn>
-                    <a:cxn ang="0">
-                      <a:pos x="connsiteX3" y="connsiteY3"/>
-                    </a:cxn>
-                  </a:cxnLst>
-                  <a:rect l="l" t="t" r="r" b="b"/>
-                  <a:pathLst>
-                    <a:path w="36000" h="57600">
-                      <a:moveTo>
-                        <a:pt x="36132" y="-88"/>
-                      </a:moveTo>
-                      <a:lnTo>
-                        <a:pt x="132" y="-88"/>
-                      </a:lnTo>
-                      <a:lnTo>
-                        <a:pt x="132" y="57512"/>
-                      </a:lnTo>
-                      <a:lnTo>
-                        <a:pt x="36132" y="57512"/>
-                      </a:lnTo>
-                      <a:close/>
-                    </a:path>
-                  </a:pathLst>
-                </a:custGeom>
-                <a:noFill/>
-                <a:ln w="3598" cap="sq">
-                  <a:solidFill>
-                    <a:srgbClr val="000000"/>
-                  </a:solidFill>
-                  <a:prstDash val="solid"/>
-                  <a:miter/>
-                </a:ln>
-              </p:spPr>
-              <p:txBody>
-                <a:bodyPr rtlCol="0" anchor="ctr"/>
-                <a:lstStyle/>
-                <a:p>
-                  <a:endParaRPr lang="ja-JP" altLang="en-US"/>
-                </a:p>
-              </p:txBody>
-            </p:sp>
-            <p:sp>
-              <p:nvSpPr>
-                <p:cNvPr id="20" name="フリーフォーム: 図形 19">
-                  <a:extLst>
-                    <a:ext uri="{FF2B5EF4-FFF2-40B4-BE49-F238E27FC236}">
-                      <a16:creationId xmlns:a16="http://schemas.microsoft.com/office/drawing/2014/main" id="{B9B0D61C-B29A-7EE6-C1E2-F68EB9E55804}"/>
-                    </a:ext>
-                  </a:extLst>
-                </p:cNvPr>
-                <p:cNvSpPr/>
-                <p:nvPr/>
-              </p:nvSpPr>
-              <p:spPr>
-                <a:xfrm>
-                  <a:off x="6472742" y="3926790"/>
-                  <a:ext cx="10799" cy="57600"/>
-                </a:xfrm>
-                <a:custGeom>
-                  <a:avLst/>
-                  <a:gdLst>
-                    <a:gd name="connsiteX0" fmla="*/ 10934 w 10799"/>
-                    <a:gd name="connsiteY0" fmla="*/ -88 h 57600"/>
-                    <a:gd name="connsiteX1" fmla="*/ 134 w 10799"/>
-                    <a:gd name="connsiteY1" fmla="*/ -88 h 57600"/>
-                    <a:gd name="connsiteX2" fmla="*/ 134 w 10799"/>
-                    <a:gd name="connsiteY2" fmla="*/ 57512 h 57600"/>
-                    <a:gd name="connsiteX3" fmla="*/ 10934 w 10799"/>
-                    <a:gd name="connsiteY3" fmla="*/ 57512 h 57600"/>
-                  </a:gdLst>
-                  <a:ahLst/>
-                  <a:cxnLst>
-                    <a:cxn ang="0">
-                      <a:pos x="connsiteX0" y="connsiteY0"/>
-                    </a:cxn>
-                    <a:cxn ang="0">
-                      <a:pos x="connsiteX1" y="connsiteY1"/>
-                    </a:cxn>
-                    <a:cxn ang="0">
-                      <a:pos x="connsiteX2" y="connsiteY2"/>
-                    </a:cxn>
-                    <a:cxn ang="0">
-                      <a:pos x="connsiteX3" y="connsiteY3"/>
-                    </a:cxn>
-                  </a:cxnLst>
-                  <a:rect l="l" t="t" r="r" b="b"/>
-                  <a:pathLst>
-                    <a:path w="10799" h="57600">
-                      <a:moveTo>
-                        <a:pt x="10934" y="-88"/>
-                      </a:moveTo>
-                      <a:lnTo>
-                        <a:pt x="134" y="-88"/>
-                      </a:lnTo>
-                      <a:lnTo>
-                        <a:pt x="134" y="57512"/>
-                      </a:lnTo>
-                      <a:lnTo>
-                        <a:pt x="10934" y="57512"/>
-                      </a:lnTo>
-                      <a:close/>
-                    </a:path>
-                  </a:pathLst>
-                </a:custGeom>
-                <a:noFill/>
-                <a:ln w="3598" cap="sq">
-                  <a:solidFill>
-                    <a:srgbClr val="000000"/>
-                  </a:solidFill>
-                  <a:prstDash val="solid"/>
-                  <a:miter/>
-                </a:ln>
-              </p:spPr>
-              <p:txBody>
-                <a:bodyPr rtlCol="0" anchor="ctr"/>
-                <a:lstStyle/>
-                <a:p>
-                  <a:endParaRPr lang="ja-JP" altLang="en-US"/>
-                </a:p>
-              </p:txBody>
-            </p:sp>
-            <p:sp>
-              <p:nvSpPr>
-                <p:cNvPr id="21" name="フリーフォーム: 図形 20">
-                  <a:extLst>
-                    <a:ext uri="{FF2B5EF4-FFF2-40B4-BE49-F238E27FC236}">
-                      <a16:creationId xmlns:a16="http://schemas.microsoft.com/office/drawing/2014/main" id="{DD6E24DE-0830-A173-B98B-E5FE8E909F7E}"/>
-                    </a:ext>
-                  </a:extLst>
-                </p:cNvPr>
-                <p:cNvSpPr/>
-                <p:nvPr/>
-              </p:nvSpPr>
-              <p:spPr>
-                <a:xfrm>
-                  <a:off x="6170342" y="3926790"/>
-                  <a:ext cx="7199" cy="57600"/>
-                </a:xfrm>
-                <a:custGeom>
-                  <a:avLst/>
-                  <a:gdLst>
-                    <a:gd name="connsiteX0" fmla="*/ 7310 w 7199"/>
-                    <a:gd name="connsiteY0" fmla="*/ -88 h 57600"/>
-                    <a:gd name="connsiteX1" fmla="*/ 110 w 7199"/>
-                    <a:gd name="connsiteY1" fmla="*/ -88 h 57600"/>
-                    <a:gd name="connsiteX2" fmla="*/ 110 w 7199"/>
-                    <a:gd name="connsiteY2" fmla="*/ 57512 h 57600"/>
-                    <a:gd name="connsiteX3" fmla="*/ 7310 w 7199"/>
-                    <a:gd name="connsiteY3" fmla="*/ 57512 h 57600"/>
-                  </a:gdLst>
-                  <a:ahLst/>
-                  <a:cxnLst>
-                    <a:cxn ang="0">
-                      <a:pos x="connsiteX0" y="connsiteY0"/>
-                    </a:cxn>
-                    <a:cxn ang="0">
-                      <a:pos x="connsiteX1" y="connsiteY1"/>
-                    </a:cxn>
-                    <a:cxn ang="0">
-                      <a:pos x="connsiteX2" y="connsiteY2"/>
-                    </a:cxn>
-                    <a:cxn ang="0">
-                      <a:pos x="connsiteX3" y="connsiteY3"/>
-                    </a:cxn>
-                  </a:cxnLst>
-                  <a:rect l="l" t="t" r="r" b="b"/>
-                  <a:pathLst>
-                    <a:path w="7199" h="57600">
-                      <a:moveTo>
-                        <a:pt x="7310" y="-88"/>
-                      </a:moveTo>
-                      <a:lnTo>
-                        <a:pt x="110" y="-88"/>
-                      </a:lnTo>
-                      <a:lnTo>
-                        <a:pt x="110" y="57512"/>
-                      </a:lnTo>
-                      <a:lnTo>
-                        <a:pt x="7310" y="57512"/>
-                      </a:lnTo>
-                      <a:close/>
-                    </a:path>
-                  </a:pathLst>
-                </a:custGeom>
-                <a:noFill/>
-                <a:ln w="3598" cap="sq">
-                  <a:solidFill>
-                    <a:srgbClr val="000000"/>
-                  </a:solidFill>
-                  <a:prstDash val="solid"/>
-                  <a:miter/>
-                </a:ln>
-              </p:spPr>
-              <p:txBody>
-                <a:bodyPr rtlCol="0" anchor="ctr"/>
-                <a:lstStyle/>
-                <a:p>
-                  <a:endParaRPr lang="ja-JP" altLang="en-US"/>
-                </a:p>
-              </p:txBody>
-            </p:sp>
-          </p:grpSp>
-        </p:grpSp>
-        <p:sp>
-          <p:nvSpPr>
-            <p:cNvPr id="22" name="フリーフォーム: 図形 21">
-              <a:extLst>
-                <a:ext uri="{FF2B5EF4-FFF2-40B4-BE49-F238E27FC236}">
-                  <a16:creationId xmlns:a16="http://schemas.microsoft.com/office/drawing/2014/main" id="{4092FB60-F0ED-2576-1938-3F819BCF6302}"/>
-                </a:ext>
-              </a:extLst>
-            </p:cNvPr>
-            <p:cNvSpPr/>
-            <p:nvPr/>
-          </p:nvSpPr>
-          <p:spPr>
-            <a:xfrm>
-              <a:off x="7113542" y="3771990"/>
-              <a:ext cx="18000" cy="378000"/>
-            </a:xfrm>
-            <a:custGeom>
-              <a:avLst/>
-              <a:gdLst>
-                <a:gd name="connsiteX0" fmla="*/ 184 w 18000"/>
-                <a:gd name="connsiteY0" fmla="*/ -88 h 378000"/>
-                <a:gd name="connsiteX1" fmla="*/ 18184 w 18000"/>
-                <a:gd name="connsiteY1" fmla="*/ -88 h 378000"/>
-                <a:gd name="connsiteX2" fmla="*/ 18184 w 18000"/>
-                <a:gd name="connsiteY2" fmla="*/ 377912 h 378000"/>
-                <a:gd name="connsiteX3" fmla="*/ 184 w 18000"/>
-                <a:gd name="connsiteY3" fmla="*/ 377912 h 378000"/>
-              </a:gdLst>
-              <a:ahLst/>
-              <a:cxnLst>
-                <a:cxn ang="0">
-                  <a:pos x="connsiteX0" y="connsiteY0"/>
-                </a:cxn>
-                <a:cxn ang="0">
-                  <a:pos x="connsiteX1" y="connsiteY1"/>
-                </a:cxn>
-                <a:cxn ang="0">
-                  <a:pos x="connsiteX2" y="connsiteY2"/>
-                </a:cxn>
-                <a:cxn ang="0">
-                  <a:pos x="connsiteX3" y="connsiteY3"/>
-                </a:cxn>
-              </a:cxnLst>
-              <a:rect l="l" t="t" r="r" b="b"/>
-              <a:pathLst>
-                <a:path w="18000" h="378000">
-                  <a:moveTo>
-                    <a:pt x="184" y="-88"/>
-                  </a:moveTo>
-                  <a:lnTo>
-                    <a:pt x="18184" y="-88"/>
-                  </a:lnTo>
-                  <a:lnTo>
-                    <a:pt x="18184" y="377912"/>
-                  </a:lnTo>
-                  <a:lnTo>
-                    <a:pt x="184" y="377912"/>
-                  </a:lnTo>
-                  <a:close/>
-                </a:path>
-              </a:pathLst>
-            </a:custGeom>
-            <a:noFill/>
-            <a:ln w="3598" cap="sq">
-              <a:solidFill>
-                <a:srgbClr val="000000"/>
-              </a:solidFill>
-              <a:prstDash val="solid"/>
-              <a:miter/>
-            </a:ln>
-          </p:spPr>
-          <p:txBody>
-            <a:bodyPr rtlCol="0" anchor="ctr"/>
-            <a:lstStyle/>
-            <a:p>
-              <a:endParaRPr lang="ja-JP" altLang="en-US"/>
-            </a:p>
-          </p:txBody>
-        </p:sp>
-        <p:sp>
-          <p:nvSpPr>
-            <p:cNvPr id="23" name="フリーフォーム: 図形 22">
-              <a:extLst>
-                <a:ext uri="{FF2B5EF4-FFF2-40B4-BE49-F238E27FC236}">
-                  <a16:creationId xmlns:a16="http://schemas.microsoft.com/office/drawing/2014/main" id="{0E00E110-FFA9-EDE8-CF2D-8B2A45A05499}"/>
-                </a:ext>
-              </a:extLst>
-            </p:cNvPr>
-            <p:cNvSpPr/>
-            <p:nvPr/>
-          </p:nvSpPr>
-          <p:spPr>
-            <a:xfrm>
-              <a:off x="6591542" y="3872790"/>
-              <a:ext cx="288000" cy="331200"/>
-            </a:xfrm>
-            <a:custGeom>
-              <a:avLst/>
-              <a:gdLst>
-                <a:gd name="connsiteX0" fmla="*/ 154 w 288000"/>
-                <a:gd name="connsiteY0" fmla="*/ -82 h 331200"/>
-                <a:gd name="connsiteX1" fmla="*/ 288154 w 288000"/>
-                <a:gd name="connsiteY1" fmla="*/ -82 h 331200"/>
-                <a:gd name="connsiteX2" fmla="*/ 288154 w 288000"/>
-                <a:gd name="connsiteY2" fmla="*/ 331119 h 331200"/>
-                <a:gd name="connsiteX3" fmla="*/ 154 w 288000"/>
-                <a:gd name="connsiteY3" fmla="*/ 331119 h 331200"/>
-              </a:gdLst>
-              <a:ahLst/>
-              <a:cxnLst>
-                <a:cxn ang="0">
-                  <a:pos x="connsiteX0" y="connsiteY0"/>
-                </a:cxn>
-                <a:cxn ang="0">
-                  <a:pos x="connsiteX1" y="connsiteY1"/>
-                </a:cxn>
-                <a:cxn ang="0">
-                  <a:pos x="connsiteX2" y="connsiteY2"/>
-                </a:cxn>
-                <a:cxn ang="0">
-                  <a:pos x="connsiteX3" y="connsiteY3"/>
-                </a:cxn>
-              </a:cxnLst>
-              <a:rect l="l" t="t" r="r" b="b"/>
-              <a:pathLst>
-                <a:path w="288000" h="331200">
-                  <a:moveTo>
-                    <a:pt x="154" y="-82"/>
-                  </a:moveTo>
-                  <a:lnTo>
-                    <a:pt x="288154" y="-82"/>
-                  </a:lnTo>
-                  <a:lnTo>
-                    <a:pt x="288154" y="331119"/>
-                  </a:lnTo>
-                  <a:lnTo>
-                    <a:pt x="154" y="331119"/>
-                  </a:lnTo>
-                  <a:close/>
-                </a:path>
-              </a:pathLst>
-            </a:custGeom>
-            <a:noFill/>
-            <a:ln w="3598" cap="sq">
-              <a:solidFill>
-                <a:srgbClr val="000000"/>
-              </a:solidFill>
-              <a:prstDash val="solid"/>
-              <a:miter/>
-            </a:ln>
-          </p:spPr>
-          <p:txBody>
-            <a:bodyPr rtlCol="0" anchor="ctr"/>
-            <a:lstStyle/>
-            <a:p>
-              <a:endParaRPr lang="ja-JP" altLang="en-US"/>
-            </a:p>
-          </p:txBody>
-        </p:sp>
-      </p:grpSp>
-      <p:grpSp>
-        <p:nvGrpSpPr>
-          <p:cNvPr id="24" name="グラフィックス 4">
-            <a:extLst>
-              <a:ext uri="{FF2B5EF4-FFF2-40B4-BE49-F238E27FC236}">
-                <a16:creationId xmlns:a16="http://schemas.microsoft.com/office/drawing/2014/main" id="{1935D091-53DF-29ED-3FAA-ABC39B46ABE7}"/>
-              </a:ext>
-            </a:extLst>
-          </p:cNvPr>
-          <p:cNvGrpSpPr/>
-          <p:nvPr/>
-        </p:nvGrpSpPr>
-        <p:grpSpPr>
-          <a:xfrm>
-            <a:off x="7187699" y="2554520"/>
-            <a:ext cx="216000" cy="360000"/>
-            <a:chOff x="7187699" y="2554520"/>
-            <a:chExt cx="216000" cy="360000"/>
-          </a:xfrm>
-          <a:noFill/>
-        </p:grpSpPr>
-        <p:sp>
-          <p:nvSpPr>
-            <p:cNvPr id="25" name="フリーフォーム: 図形 24">
-              <a:extLst>
-                <a:ext uri="{FF2B5EF4-FFF2-40B4-BE49-F238E27FC236}">
-                  <a16:creationId xmlns:a16="http://schemas.microsoft.com/office/drawing/2014/main" id="{DA10DAC2-8482-55C4-62ED-9B1C1997AC80}"/>
-                </a:ext>
-              </a:extLst>
-            </p:cNvPr>
-            <p:cNvSpPr/>
-            <p:nvPr/>
-          </p:nvSpPr>
-          <p:spPr>
-            <a:xfrm>
-              <a:off x="7187699" y="2734520"/>
-              <a:ext cx="216000" cy="180000"/>
-            </a:xfrm>
-            <a:custGeom>
-              <a:avLst/>
-              <a:gdLst>
-                <a:gd name="connsiteX0" fmla="*/ 197 w 216000"/>
-                <a:gd name="connsiteY0" fmla="*/ -190 h 180000"/>
-                <a:gd name="connsiteX1" fmla="*/ 216197 w 216000"/>
-                <a:gd name="connsiteY1" fmla="*/ -190 h 180000"/>
-                <a:gd name="connsiteX2" fmla="*/ 216197 w 216000"/>
-                <a:gd name="connsiteY2" fmla="*/ 179810 h 180000"/>
-                <a:gd name="connsiteX3" fmla="*/ 197 w 216000"/>
-                <a:gd name="connsiteY3" fmla="*/ 179810 h 180000"/>
-              </a:gdLst>
-              <a:ahLst/>
-              <a:cxnLst>
-                <a:cxn ang="0">
-                  <a:pos x="connsiteX0" y="connsiteY0"/>
-                </a:cxn>
-                <a:cxn ang="0">
-                  <a:pos x="connsiteX1" y="connsiteY1"/>
-                </a:cxn>
-                <a:cxn ang="0">
-                  <a:pos x="connsiteX2" y="connsiteY2"/>
-                </a:cxn>
-                <a:cxn ang="0">
-                  <a:pos x="connsiteX3" y="connsiteY3"/>
-                </a:cxn>
-              </a:cxnLst>
-              <a:rect l="l" t="t" r="r" b="b"/>
-              <a:pathLst>
-                <a:path w="216000" h="180000">
-                  <a:moveTo>
-                    <a:pt x="197" y="-190"/>
-                  </a:moveTo>
-                  <a:lnTo>
-                    <a:pt x="216197" y="-190"/>
-                  </a:lnTo>
-                  <a:lnTo>
-                    <a:pt x="216197" y="179810"/>
-                  </a:lnTo>
-                  <a:lnTo>
-                    <a:pt x="197" y="179810"/>
-                  </a:lnTo>
-                  <a:close/>
-                </a:path>
-              </a:pathLst>
-            </a:custGeom>
-            <a:noFill/>
-            <a:ln w="3602" cap="sq">
-              <a:solidFill>
-                <a:srgbClr val="000000"/>
-              </a:solidFill>
-              <a:prstDash val="solid"/>
-              <a:miter/>
-            </a:ln>
-          </p:spPr>
-          <p:txBody>
-            <a:bodyPr rtlCol="0" anchor="ctr"/>
-            <a:lstStyle/>
-            <a:p>
-              <a:endParaRPr lang="ja-JP" altLang="en-US"/>
-            </a:p>
-          </p:txBody>
-        </p:sp>
-        <p:sp>
-          <p:nvSpPr>
-            <p:cNvPr id="26" name="フリーフォーム: 図形 25">
-              <a:extLst>
-                <a:ext uri="{FF2B5EF4-FFF2-40B4-BE49-F238E27FC236}">
-                  <a16:creationId xmlns:a16="http://schemas.microsoft.com/office/drawing/2014/main" id="{391BA687-276B-5F19-F1FF-75FCE21EFA8F}"/>
-                </a:ext>
-              </a:extLst>
-            </p:cNvPr>
-            <p:cNvSpPr/>
-            <p:nvPr/>
-          </p:nvSpPr>
-          <p:spPr>
-            <a:xfrm>
-              <a:off x="7205699" y="2554520"/>
-              <a:ext cx="180000" cy="180000"/>
-            </a:xfrm>
-            <a:custGeom>
-              <a:avLst/>
-              <a:gdLst>
-                <a:gd name="connsiteX0" fmla="*/ 197 w 180000"/>
-                <a:gd name="connsiteY0" fmla="*/ -204 h 180000"/>
-                <a:gd name="connsiteX1" fmla="*/ 180197 w 180000"/>
-                <a:gd name="connsiteY1" fmla="*/ -204 h 180000"/>
-                <a:gd name="connsiteX2" fmla="*/ 180197 w 180000"/>
-                <a:gd name="connsiteY2" fmla="*/ 179796 h 180000"/>
-                <a:gd name="connsiteX3" fmla="*/ 197 w 180000"/>
-                <a:gd name="connsiteY3" fmla="*/ 179796 h 180000"/>
-              </a:gdLst>
-              <a:ahLst/>
-              <a:cxnLst>
-                <a:cxn ang="0">
-                  <a:pos x="connsiteX0" y="connsiteY0"/>
-                </a:cxn>
-                <a:cxn ang="0">
-                  <a:pos x="connsiteX1" y="connsiteY1"/>
-                </a:cxn>
-                <a:cxn ang="0">
-                  <a:pos x="connsiteX2" y="connsiteY2"/>
-                </a:cxn>
-                <a:cxn ang="0">
-                  <a:pos x="connsiteX3" y="connsiteY3"/>
-                </a:cxn>
-              </a:cxnLst>
-              <a:rect l="l" t="t" r="r" b="b"/>
-              <a:pathLst>
-                <a:path w="180000" h="180000">
-                  <a:moveTo>
-                    <a:pt x="197" y="-204"/>
-                  </a:moveTo>
-                  <a:lnTo>
-                    <a:pt x="180197" y="-204"/>
-                  </a:lnTo>
-                  <a:lnTo>
-                    <a:pt x="180197" y="179796"/>
-                  </a:lnTo>
-                  <a:lnTo>
-                    <a:pt x="197" y="179796"/>
-                  </a:lnTo>
-                  <a:close/>
-                </a:path>
-              </a:pathLst>
-            </a:custGeom>
-            <a:noFill/>
-            <a:ln w="3602" cap="sq">
-              <a:solidFill>
-                <a:srgbClr val="000000"/>
-              </a:solidFill>
-              <a:prstDash val="solid"/>
-              <a:miter/>
-            </a:ln>
-          </p:spPr>
-          <p:txBody>
-            <a:bodyPr rtlCol="0" anchor="ctr"/>
-            <a:lstStyle/>
-            <a:p>
-              <a:endParaRPr lang="ja-JP" altLang="en-US"/>
-            </a:p>
-          </p:txBody>
-        </p:sp>
-        <p:sp>
-          <p:nvSpPr>
-            <p:cNvPr id="27" name="フリーフォーム: 図形 26">
-              <a:extLst>
-                <a:ext uri="{FF2B5EF4-FFF2-40B4-BE49-F238E27FC236}">
-                  <a16:creationId xmlns:a16="http://schemas.microsoft.com/office/drawing/2014/main" id="{88B4F113-7736-9A32-A51D-FA9D22886468}"/>
-                </a:ext>
-              </a:extLst>
-            </p:cNvPr>
-            <p:cNvSpPr/>
-            <p:nvPr/>
-          </p:nvSpPr>
-          <p:spPr>
-            <a:xfrm>
-              <a:off x="7277699" y="2626520"/>
-              <a:ext cx="36000" cy="108000"/>
-            </a:xfrm>
-            <a:custGeom>
-              <a:avLst/>
-              <a:gdLst>
-                <a:gd name="connsiteX0" fmla="*/ 197 w 36000"/>
-                <a:gd name="connsiteY0" fmla="*/ -201 h 108000"/>
-                <a:gd name="connsiteX1" fmla="*/ 36197 w 36000"/>
-                <a:gd name="connsiteY1" fmla="*/ -201 h 108000"/>
-                <a:gd name="connsiteX2" fmla="*/ 36197 w 36000"/>
-                <a:gd name="connsiteY2" fmla="*/ 107799 h 108000"/>
-                <a:gd name="connsiteX3" fmla="*/ 197 w 36000"/>
-                <a:gd name="connsiteY3" fmla="*/ 107799 h 108000"/>
-              </a:gdLst>
-              <a:ahLst/>
-              <a:cxnLst>
-                <a:cxn ang="0">
-                  <a:pos x="connsiteX0" y="connsiteY0"/>
-                </a:cxn>
-                <a:cxn ang="0">
-                  <a:pos x="connsiteX1" y="connsiteY1"/>
-                </a:cxn>
-                <a:cxn ang="0">
-                  <a:pos x="connsiteX2" y="connsiteY2"/>
-                </a:cxn>
-                <a:cxn ang="0">
-                  <a:pos x="connsiteX3" y="connsiteY3"/>
-                </a:cxn>
-              </a:cxnLst>
-              <a:rect l="l" t="t" r="r" b="b"/>
-              <a:pathLst>
-                <a:path w="36000" h="108000">
-                  <a:moveTo>
-                    <a:pt x="197" y="-201"/>
-                  </a:moveTo>
-                  <a:lnTo>
-                    <a:pt x="36197" y="-201"/>
-                  </a:lnTo>
-                  <a:lnTo>
-                    <a:pt x="36197" y="107799"/>
-                  </a:lnTo>
-                  <a:lnTo>
-                    <a:pt x="197" y="107799"/>
-                  </a:lnTo>
-                  <a:close/>
-                </a:path>
-              </a:pathLst>
-            </a:custGeom>
-            <a:noFill/>
-            <a:ln w="3602" cap="sq">
-              <a:solidFill>
-                <a:srgbClr val="000000"/>
-              </a:solidFill>
-              <a:prstDash val="solid"/>
-              <a:miter/>
-            </a:ln>
-          </p:spPr>
-          <p:txBody>
-            <a:bodyPr rtlCol="0" anchor="ctr"/>
-            <a:lstStyle/>
-            <a:p>
-              <a:endParaRPr lang="ja-JP" altLang="en-US"/>
-            </a:p>
-          </p:txBody>
-        </p:sp>
-        <p:sp>
-          <p:nvSpPr>
-            <p:cNvPr id="28" name="フリーフォーム: 図形 27">
-              <a:extLst>
-                <a:ext uri="{FF2B5EF4-FFF2-40B4-BE49-F238E27FC236}">
-                  <a16:creationId xmlns:a16="http://schemas.microsoft.com/office/drawing/2014/main" id="{3A44E41F-A02E-F876-9AAF-C9041447A96A}"/>
-                </a:ext>
-              </a:extLst>
-            </p:cNvPr>
-            <p:cNvSpPr/>
-            <p:nvPr/>
-          </p:nvSpPr>
-          <p:spPr>
-            <a:xfrm>
-              <a:off x="7293899" y="2626520"/>
-              <a:ext cx="3599" cy="108000"/>
-            </a:xfrm>
-            <a:custGeom>
-              <a:avLst/>
-              <a:gdLst>
-                <a:gd name="connsiteX0" fmla="*/ 197 w 3599"/>
-                <a:gd name="connsiteY0" fmla="*/ -201 h 108000"/>
-                <a:gd name="connsiteX1" fmla="*/ 3797 w 3599"/>
-                <a:gd name="connsiteY1" fmla="*/ -201 h 108000"/>
-                <a:gd name="connsiteX2" fmla="*/ 3797 w 3599"/>
-                <a:gd name="connsiteY2" fmla="*/ 107799 h 108000"/>
-                <a:gd name="connsiteX3" fmla="*/ 197 w 3599"/>
-                <a:gd name="connsiteY3" fmla="*/ 107799 h 108000"/>
-              </a:gdLst>
-              <a:ahLst/>
-              <a:cxnLst>
-                <a:cxn ang="0">
-                  <a:pos x="connsiteX0" y="connsiteY0"/>
-                </a:cxn>
-                <a:cxn ang="0">
-                  <a:pos x="connsiteX1" y="connsiteY1"/>
-                </a:cxn>
-                <a:cxn ang="0">
-                  <a:pos x="connsiteX2" y="connsiteY2"/>
-                </a:cxn>
-                <a:cxn ang="0">
-                  <a:pos x="connsiteX3" y="connsiteY3"/>
-                </a:cxn>
-              </a:cxnLst>
-              <a:rect l="l" t="t" r="r" b="b"/>
-              <a:pathLst>
-                <a:path w="3599" h="108000">
-                  <a:moveTo>
-                    <a:pt x="197" y="-201"/>
-                  </a:moveTo>
-                  <a:lnTo>
-                    <a:pt x="3797" y="-201"/>
-                  </a:lnTo>
-                  <a:lnTo>
-                    <a:pt x="3797" y="107799"/>
-                  </a:lnTo>
-                  <a:lnTo>
-                    <a:pt x="197" y="107799"/>
-                  </a:lnTo>
-                  <a:close/>
-                </a:path>
-              </a:pathLst>
-            </a:custGeom>
-            <a:noFill/>
-            <a:ln w="3602" cap="sq">
-              <a:solidFill>
-                <a:srgbClr val="000000"/>
-              </a:solidFill>
-              <a:prstDash val="solid"/>
-              <a:miter/>
-            </a:ln>
-          </p:spPr>
-          <p:txBody>
-            <a:bodyPr rtlCol="0" anchor="ctr"/>
-            <a:lstStyle/>
-            <a:p>
-              <a:endParaRPr lang="ja-JP" altLang="en-US"/>
-            </a:p>
-          </p:txBody>
-        </p:sp>
-        <p:sp>
-          <p:nvSpPr>
-            <p:cNvPr id="29" name="フリーフォーム: 図形 28">
-              <a:extLst>
-                <a:ext uri="{FF2B5EF4-FFF2-40B4-BE49-F238E27FC236}">
-                  <a16:creationId xmlns:a16="http://schemas.microsoft.com/office/drawing/2014/main" id="{E0F36B22-08BB-24F1-C08F-974D506A2DB4}"/>
-                </a:ext>
-              </a:extLst>
-            </p:cNvPr>
-            <p:cNvSpPr/>
-            <p:nvPr/>
-          </p:nvSpPr>
-          <p:spPr>
-            <a:xfrm>
-              <a:off x="7223699" y="2752520"/>
-              <a:ext cx="144000" cy="144000"/>
-            </a:xfrm>
-            <a:custGeom>
-              <a:avLst/>
-              <a:gdLst>
-                <a:gd name="connsiteX0" fmla="*/ 144197 w 144000"/>
-                <a:gd name="connsiteY0" fmla="*/ 71810 h 144000"/>
-                <a:gd name="connsiteX1" fmla="*/ 72197 w 144000"/>
-                <a:gd name="connsiteY1" fmla="*/ 143810 h 144000"/>
-                <a:gd name="connsiteX2" fmla="*/ 197 w 144000"/>
-                <a:gd name="connsiteY2" fmla="*/ 71810 h 144000"/>
-                <a:gd name="connsiteX3" fmla="*/ 72197 w 144000"/>
-                <a:gd name="connsiteY3" fmla="*/ -190 h 144000"/>
-                <a:gd name="connsiteX4" fmla="*/ 144197 w 144000"/>
-                <a:gd name="connsiteY4" fmla="*/ 71810 h 144000"/>
-              </a:gdLst>
-              <a:ahLst/>
-              <a:cxnLst>
-                <a:cxn ang="0">
-                  <a:pos x="connsiteX0" y="connsiteY0"/>
-                </a:cxn>
-                <a:cxn ang="0">
-                  <a:pos x="connsiteX1" y="connsiteY1"/>
-                </a:cxn>
-                <a:cxn ang="0">
-                  <a:pos x="connsiteX2" y="connsiteY2"/>
-                </a:cxn>
-                <a:cxn ang="0">
-                  <a:pos x="connsiteX3" y="connsiteY3"/>
-                </a:cxn>
-                <a:cxn ang="0">
-                  <a:pos x="connsiteX4" y="connsiteY4"/>
-                </a:cxn>
-              </a:cxnLst>
-              <a:rect l="l" t="t" r="r" b="b"/>
-              <a:pathLst>
-                <a:path w="144000" h="144000">
-                  <a:moveTo>
-                    <a:pt x="144197" y="71810"/>
-                  </a:moveTo>
-                  <a:cubicBezTo>
-                    <a:pt x="144197" y="111574"/>
-                    <a:pt x="111961" y="143810"/>
-                    <a:pt x="72197" y="143810"/>
-                  </a:cubicBezTo>
-                  <a:cubicBezTo>
-                    <a:pt x="32432" y="143810"/>
-                    <a:pt x="197" y="111574"/>
-                    <a:pt x="197" y="71810"/>
-                  </a:cubicBezTo>
-                  <a:cubicBezTo>
-                    <a:pt x="197" y="32045"/>
-                    <a:pt x="32432" y="-190"/>
-                    <a:pt x="72197" y="-190"/>
-                  </a:cubicBezTo>
-                  <a:cubicBezTo>
-                    <a:pt x="111961" y="-190"/>
-                    <a:pt x="144197" y="32045"/>
-                    <a:pt x="144197" y="71810"/>
-                  </a:cubicBezTo>
-                  <a:close/>
-                </a:path>
-              </a:pathLst>
-            </a:custGeom>
-            <a:noFill/>
-            <a:ln w="3602" cap="sq">
-              <a:solidFill>
-                <a:srgbClr val="000000"/>
-              </a:solidFill>
-              <a:prstDash val="solid"/>
-              <a:miter/>
-            </a:ln>
-          </p:spPr>
-          <p:txBody>
-            <a:bodyPr rtlCol="0" anchor="ctr"/>
-            <a:lstStyle/>
-            <a:p>
-              <a:endParaRPr lang="ja-JP" altLang="en-US"/>
-            </a:p>
-          </p:txBody>
-        </p:sp>
-      </p:grpSp>
-      <p:grpSp>
-        <p:nvGrpSpPr>
-          <p:cNvPr id="30" name="グラフィックス 4">
-            <a:extLst>
-              <a:ext uri="{FF2B5EF4-FFF2-40B4-BE49-F238E27FC236}">
-                <a16:creationId xmlns:a16="http://schemas.microsoft.com/office/drawing/2014/main" id="{A0769F3F-CEC6-6BAD-CF1D-521AF7ECA966}"/>
-              </a:ext>
-            </a:extLst>
-          </p:cNvPr>
-          <p:cNvGrpSpPr/>
-          <p:nvPr/>
-        </p:nvGrpSpPr>
-        <p:grpSpPr>
-          <a:xfrm>
-            <a:off x="6696730" y="2577380"/>
-            <a:ext cx="180000" cy="331236"/>
-            <a:chOff x="6696730" y="2577380"/>
-            <a:chExt cx="180000" cy="331236"/>
-          </a:xfrm>
-          <a:noFill/>
-        </p:grpSpPr>
-        <p:sp>
-          <p:nvSpPr>
-            <p:cNvPr id="31" name="フリーフォーム: 図形 30">
-              <a:extLst>
-                <a:ext uri="{FF2B5EF4-FFF2-40B4-BE49-F238E27FC236}">
-                  <a16:creationId xmlns:a16="http://schemas.microsoft.com/office/drawing/2014/main" id="{D23C7B59-EFF8-3F96-DD7E-7E24338181A1}"/>
-                </a:ext>
-              </a:extLst>
-            </p:cNvPr>
-            <p:cNvSpPr/>
-            <p:nvPr/>
-          </p:nvSpPr>
-          <p:spPr>
-            <a:xfrm>
-              <a:off x="6696730" y="2577380"/>
-              <a:ext cx="180000" cy="331236"/>
-            </a:xfrm>
-            <a:custGeom>
-              <a:avLst/>
-              <a:gdLst>
-                <a:gd name="connsiteX0" fmla="*/ 90158 w 180000"/>
-                <a:gd name="connsiteY0" fmla="*/ -197 h 331236"/>
-                <a:gd name="connsiteX1" fmla="*/ 158 w 180000"/>
-                <a:gd name="connsiteY1" fmla="*/ 89803 h 331236"/>
-                <a:gd name="connsiteX2" fmla="*/ 158 w 180000"/>
-                <a:gd name="connsiteY2" fmla="*/ 89803 h 331236"/>
-                <a:gd name="connsiteX3" fmla="*/ 158 w 180000"/>
-                <a:gd name="connsiteY3" fmla="*/ 331040 h 331236"/>
-                <a:gd name="connsiteX4" fmla="*/ 180158 w 180000"/>
-                <a:gd name="connsiteY4" fmla="*/ 331040 h 331236"/>
-                <a:gd name="connsiteX5" fmla="*/ 180158 w 180000"/>
-                <a:gd name="connsiteY5" fmla="*/ 89803 h 331236"/>
-                <a:gd name="connsiteX6" fmla="*/ 90158 w 180000"/>
-                <a:gd name="connsiteY6" fmla="*/ -197 h 331236"/>
-                <a:gd name="connsiteX7" fmla="*/ 90158 w 180000"/>
-                <a:gd name="connsiteY7" fmla="*/ -197 h 331236"/>
-              </a:gdLst>
-              <a:ahLst/>
-              <a:cxnLst>
-                <a:cxn ang="0">
-                  <a:pos x="connsiteX0" y="connsiteY0"/>
-                </a:cxn>
-                <a:cxn ang="0">
-                  <a:pos x="connsiteX1" y="connsiteY1"/>
-                </a:cxn>
-                <a:cxn ang="0">
-                  <a:pos x="connsiteX2" y="connsiteY2"/>
-                </a:cxn>
-                <a:cxn ang="0">
-                  <a:pos x="connsiteX3" y="connsiteY3"/>
-                </a:cxn>
-                <a:cxn ang="0">
-                  <a:pos x="connsiteX4" y="connsiteY4"/>
-                </a:cxn>
-                <a:cxn ang="0">
-                  <a:pos x="connsiteX5" y="connsiteY5"/>
-                </a:cxn>
-                <a:cxn ang="0">
-                  <a:pos x="connsiteX6" y="connsiteY6"/>
-                </a:cxn>
-                <a:cxn ang="0">
-                  <a:pos x="connsiteX7" y="connsiteY7"/>
-                </a:cxn>
-              </a:cxnLst>
-              <a:rect l="l" t="t" r="r" b="b"/>
-              <a:pathLst>
-                <a:path w="180000" h="331236">
-                  <a:moveTo>
-                    <a:pt x="90158" y="-197"/>
-                  </a:moveTo>
-                  <a:cubicBezTo>
-                    <a:pt x="40478" y="-197"/>
-                    <a:pt x="158" y="40088"/>
-                    <a:pt x="158" y="89803"/>
-                  </a:cubicBezTo>
-                  <a:cubicBezTo>
-                    <a:pt x="158" y="89803"/>
-                    <a:pt x="158" y="89803"/>
-                    <a:pt x="158" y="89803"/>
-                  </a:cubicBezTo>
-                  <a:lnTo>
-                    <a:pt x="158" y="331040"/>
-                  </a:lnTo>
-                  <a:lnTo>
-                    <a:pt x="180158" y="331040"/>
-                  </a:lnTo>
-                  <a:lnTo>
-                    <a:pt x="180158" y="89803"/>
-                  </a:lnTo>
-                  <a:cubicBezTo>
-                    <a:pt x="180158" y="40123"/>
-                    <a:pt x="139874" y="-197"/>
-                    <a:pt x="90158" y="-197"/>
-                  </a:cubicBezTo>
-                  <a:cubicBezTo>
-                    <a:pt x="90158" y="-197"/>
-                    <a:pt x="90158" y="-197"/>
-                    <a:pt x="90158" y="-197"/>
-                  </a:cubicBezTo>
-                  <a:close/>
-                </a:path>
-              </a:pathLst>
-            </a:custGeom>
-            <a:noFill/>
-            <a:ln w="3602" cap="sq">
-              <a:solidFill>
-                <a:srgbClr val="000000"/>
-              </a:solidFill>
-              <a:prstDash val="solid"/>
-              <a:miter/>
-            </a:ln>
-          </p:spPr>
-          <p:txBody>
-            <a:bodyPr rtlCol="0" anchor="ctr"/>
-            <a:lstStyle/>
-            <a:p>
-              <a:endParaRPr lang="ja-JP" altLang="en-US"/>
-            </a:p>
-          </p:txBody>
-        </p:sp>
-        <p:sp>
-          <p:nvSpPr>
-            <p:cNvPr id="32" name="フリーフォーム: 図形 31">
-              <a:extLst>
-                <a:ext uri="{FF2B5EF4-FFF2-40B4-BE49-F238E27FC236}">
-                  <a16:creationId xmlns:a16="http://schemas.microsoft.com/office/drawing/2014/main" id="{FBFA5D75-50ED-A609-A41F-27514EC3E055}"/>
-                </a:ext>
-              </a:extLst>
-            </p:cNvPr>
-            <p:cNvSpPr/>
-            <p:nvPr/>
-          </p:nvSpPr>
-          <p:spPr>
-            <a:xfrm>
-              <a:off x="6696730" y="2631380"/>
-              <a:ext cx="180000" cy="277200"/>
-            </a:xfrm>
-            <a:custGeom>
-              <a:avLst/>
-              <a:gdLst>
-                <a:gd name="connsiteX0" fmla="*/ 158 w 180000"/>
-                <a:gd name="connsiteY0" fmla="*/ -195 h 277200"/>
-                <a:gd name="connsiteX1" fmla="*/ 180158 w 180000"/>
-                <a:gd name="connsiteY1" fmla="*/ -195 h 277200"/>
-                <a:gd name="connsiteX2" fmla="*/ 180158 w 180000"/>
-                <a:gd name="connsiteY2" fmla="*/ 277006 h 277200"/>
-                <a:gd name="connsiteX3" fmla="*/ 158 w 180000"/>
-                <a:gd name="connsiteY3" fmla="*/ 277006 h 277200"/>
-              </a:gdLst>
-              <a:ahLst/>
-              <a:cxnLst>
-                <a:cxn ang="0">
-                  <a:pos x="connsiteX0" y="connsiteY0"/>
-                </a:cxn>
-                <a:cxn ang="0">
-                  <a:pos x="connsiteX1" y="connsiteY1"/>
-                </a:cxn>
-                <a:cxn ang="0">
-                  <a:pos x="connsiteX2" y="connsiteY2"/>
-                </a:cxn>
-                <a:cxn ang="0">
-                  <a:pos x="connsiteX3" y="connsiteY3"/>
-                </a:cxn>
-              </a:cxnLst>
-              <a:rect l="l" t="t" r="r" b="b"/>
-              <a:pathLst>
-                <a:path w="180000" h="277200">
-                  <a:moveTo>
-                    <a:pt x="158" y="-195"/>
-                  </a:moveTo>
-                  <a:lnTo>
-                    <a:pt x="180158" y="-195"/>
-                  </a:lnTo>
-                  <a:lnTo>
-                    <a:pt x="180158" y="277006"/>
-                  </a:lnTo>
-                  <a:lnTo>
-                    <a:pt x="158" y="277006"/>
-                  </a:lnTo>
-                  <a:close/>
-                </a:path>
-              </a:pathLst>
-            </a:custGeom>
-            <a:noFill/>
-            <a:ln w="3602" cap="sq">
-              <a:solidFill>
-                <a:srgbClr val="000000"/>
-              </a:solidFill>
-              <a:prstDash val="solid"/>
-              <a:miter/>
-            </a:ln>
-          </p:spPr>
-          <p:txBody>
-            <a:bodyPr rtlCol="0" anchor="ctr"/>
-            <a:lstStyle/>
-            <a:p>
-              <a:endParaRPr lang="ja-JP" altLang="en-US"/>
-            </a:p>
-          </p:txBody>
-        </p:sp>
-        <p:sp>
-          <p:nvSpPr>
-            <p:cNvPr id="33" name="フリーフォーム: 図形 32">
-              <a:extLst>
-                <a:ext uri="{FF2B5EF4-FFF2-40B4-BE49-F238E27FC236}">
-                  <a16:creationId xmlns:a16="http://schemas.microsoft.com/office/drawing/2014/main" id="{9F9B98C7-5A93-D833-9D84-2DBCCC778726}"/>
-                </a:ext>
-              </a:extLst>
-            </p:cNvPr>
-            <p:cNvSpPr/>
-            <p:nvPr/>
-          </p:nvSpPr>
-          <p:spPr>
-            <a:xfrm>
-              <a:off x="6768730" y="2854616"/>
-              <a:ext cx="36000" cy="54000"/>
-            </a:xfrm>
-            <a:custGeom>
-              <a:avLst/>
-              <a:gdLst>
-                <a:gd name="connsiteX0" fmla="*/ 158 w 36000"/>
-                <a:gd name="connsiteY0" fmla="*/ -186 h 54000"/>
-                <a:gd name="connsiteX1" fmla="*/ 36158 w 36000"/>
-                <a:gd name="connsiteY1" fmla="*/ -186 h 54000"/>
-                <a:gd name="connsiteX2" fmla="*/ 36158 w 36000"/>
-                <a:gd name="connsiteY2" fmla="*/ 53814 h 54000"/>
-                <a:gd name="connsiteX3" fmla="*/ 158 w 36000"/>
-                <a:gd name="connsiteY3" fmla="*/ 53814 h 54000"/>
-              </a:gdLst>
-              <a:ahLst/>
-              <a:cxnLst>
-                <a:cxn ang="0">
-                  <a:pos x="connsiteX0" y="connsiteY0"/>
-                </a:cxn>
-                <a:cxn ang="0">
-                  <a:pos x="connsiteX1" y="connsiteY1"/>
-                </a:cxn>
-                <a:cxn ang="0">
-                  <a:pos x="connsiteX2" y="connsiteY2"/>
-                </a:cxn>
-                <a:cxn ang="0">
-                  <a:pos x="connsiteX3" y="connsiteY3"/>
-                </a:cxn>
-              </a:cxnLst>
-              <a:rect l="l" t="t" r="r" b="b"/>
-              <a:pathLst>
-                <a:path w="36000" h="54000">
-                  <a:moveTo>
-                    <a:pt x="158" y="-186"/>
-                  </a:moveTo>
-                  <a:lnTo>
-                    <a:pt x="36158" y="-186"/>
-                  </a:lnTo>
-                  <a:lnTo>
-                    <a:pt x="36158" y="53814"/>
-                  </a:lnTo>
-                  <a:lnTo>
-                    <a:pt x="158" y="53814"/>
-                  </a:lnTo>
-                  <a:close/>
-                </a:path>
-              </a:pathLst>
-            </a:custGeom>
-            <a:noFill/>
-            <a:ln w="3602" cap="sq">
-              <a:solidFill>
-                <a:srgbClr val="000000"/>
-              </a:solidFill>
-              <a:prstDash val="solid"/>
-              <a:miter/>
-            </a:ln>
-          </p:spPr>
-          <p:txBody>
-            <a:bodyPr rtlCol="0" anchor="ctr"/>
-            <a:lstStyle/>
-            <a:p>
-              <a:endParaRPr lang="ja-JP" altLang="en-US"/>
-            </a:p>
-          </p:txBody>
-        </p:sp>
-        <p:sp>
-          <p:nvSpPr>
-            <p:cNvPr id="34" name="フリーフォーム: 図形 33">
-              <a:extLst>
-                <a:ext uri="{FF2B5EF4-FFF2-40B4-BE49-F238E27FC236}">
-                  <a16:creationId xmlns:a16="http://schemas.microsoft.com/office/drawing/2014/main" id="{120F80EB-9DF8-12FD-36A4-75D63024DF13}"/>
-                </a:ext>
-              </a:extLst>
-            </p:cNvPr>
-            <p:cNvSpPr/>
-            <p:nvPr/>
-          </p:nvSpPr>
-          <p:spPr>
-            <a:xfrm>
-              <a:off x="6784931" y="2854616"/>
-              <a:ext cx="3599" cy="54000"/>
-            </a:xfrm>
-            <a:custGeom>
-              <a:avLst/>
-              <a:gdLst>
-                <a:gd name="connsiteX0" fmla="*/ 158 w 3599"/>
-                <a:gd name="connsiteY0" fmla="*/ -186 h 54000"/>
-                <a:gd name="connsiteX1" fmla="*/ 3757 w 3599"/>
-                <a:gd name="connsiteY1" fmla="*/ -186 h 54000"/>
-                <a:gd name="connsiteX2" fmla="*/ 3757 w 3599"/>
-                <a:gd name="connsiteY2" fmla="*/ 53814 h 54000"/>
-                <a:gd name="connsiteX3" fmla="*/ 158 w 3599"/>
-                <a:gd name="connsiteY3" fmla="*/ 53814 h 54000"/>
-              </a:gdLst>
-              <a:ahLst/>
-              <a:cxnLst>
-                <a:cxn ang="0">
-                  <a:pos x="connsiteX0" y="connsiteY0"/>
-                </a:cxn>
-                <a:cxn ang="0">
-                  <a:pos x="connsiteX1" y="connsiteY1"/>
-                </a:cxn>
-                <a:cxn ang="0">
-                  <a:pos x="connsiteX2" y="connsiteY2"/>
-                </a:cxn>
-                <a:cxn ang="0">
-                  <a:pos x="connsiteX3" y="connsiteY3"/>
-                </a:cxn>
-              </a:cxnLst>
-              <a:rect l="l" t="t" r="r" b="b"/>
-              <a:pathLst>
-                <a:path w="3599" h="54000">
-                  <a:moveTo>
-                    <a:pt x="158" y="-186"/>
-                  </a:moveTo>
-                  <a:lnTo>
-                    <a:pt x="3757" y="-186"/>
-                  </a:lnTo>
-                  <a:lnTo>
-                    <a:pt x="3757" y="53814"/>
-                  </a:lnTo>
-                  <a:lnTo>
-                    <a:pt x="158" y="53814"/>
-                  </a:lnTo>
-                  <a:close/>
-                </a:path>
-              </a:pathLst>
-            </a:custGeom>
-            <a:noFill/>
-            <a:ln w="3602" cap="sq">
-              <a:solidFill>
-                <a:srgbClr val="000000"/>
-              </a:solidFill>
-              <a:prstDash val="solid"/>
-              <a:miter/>
-            </a:ln>
-          </p:spPr>
-          <p:txBody>
-            <a:bodyPr rtlCol="0" anchor="ctr"/>
-            <a:lstStyle/>
-            <a:p>
-              <a:endParaRPr lang="ja-JP" altLang="en-US"/>
-            </a:p>
-          </p:txBody>
-        </p:sp>
-        <p:sp>
-          <p:nvSpPr>
-            <p:cNvPr id="35" name="フリーフォーム: 図形 34">
-              <a:extLst>
-                <a:ext uri="{FF2B5EF4-FFF2-40B4-BE49-F238E27FC236}">
-                  <a16:creationId xmlns:a16="http://schemas.microsoft.com/office/drawing/2014/main" id="{94CC04A4-AF36-5CD8-C12B-B65E3D3948C7}"/>
-                </a:ext>
-              </a:extLst>
-            </p:cNvPr>
-            <p:cNvSpPr/>
-            <p:nvPr/>
-          </p:nvSpPr>
-          <p:spPr>
-            <a:xfrm>
-              <a:off x="6784931" y="2631380"/>
-              <a:ext cx="3599" cy="54000"/>
-            </a:xfrm>
-            <a:custGeom>
-              <a:avLst/>
-              <a:gdLst>
-                <a:gd name="connsiteX0" fmla="*/ 158 w 3599"/>
-                <a:gd name="connsiteY0" fmla="*/ -203 h 54000"/>
-                <a:gd name="connsiteX1" fmla="*/ 3757 w 3599"/>
-                <a:gd name="connsiteY1" fmla="*/ -203 h 54000"/>
-                <a:gd name="connsiteX2" fmla="*/ 3757 w 3599"/>
-                <a:gd name="connsiteY2" fmla="*/ 53797 h 54000"/>
-                <a:gd name="connsiteX3" fmla="*/ 158 w 3599"/>
-                <a:gd name="connsiteY3" fmla="*/ 53797 h 54000"/>
-              </a:gdLst>
-              <a:ahLst/>
-              <a:cxnLst>
-                <a:cxn ang="0">
-                  <a:pos x="connsiteX0" y="connsiteY0"/>
-                </a:cxn>
-                <a:cxn ang="0">
-                  <a:pos x="connsiteX1" y="connsiteY1"/>
-                </a:cxn>
-                <a:cxn ang="0">
-                  <a:pos x="connsiteX2" y="connsiteY2"/>
-                </a:cxn>
-                <a:cxn ang="0">
-                  <a:pos x="connsiteX3" y="connsiteY3"/>
-                </a:cxn>
-              </a:cxnLst>
-              <a:rect l="l" t="t" r="r" b="b"/>
-              <a:pathLst>
-                <a:path w="3599" h="54000">
-                  <a:moveTo>
-                    <a:pt x="158" y="-203"/>
-                  </a:moveTo>
-                  <a:lnTo>
-                    <a:pt x="3757" y="-203"/>
-                  </a:lnTo>
-                  <a:lnTo>
-                    <a:pt x="3757" y="53797"/>
-                  </a:lnTo>
-                  <a:lnTo>
-                    <a:pt x="158" y="53797"/>
-                  </a:lnTo>
-                  <a:close/>
-                </a:path>
-              </a:pathLst>
-            </a:custGeom>
-            <a:noFill/>
-            <a:ln w="3602" cap="sq">
-              <a:solidFill>
-                <a:srgbClr val="000000"/>
-              </a:solidFill>
-              <a:prstDash val="solid"/>
-              <a:miter/>
-            </a:ln>
-          </p:spPr>
-          <p:txBody>
-            <a:bodyPr rtlCol="0" anchor="ctr"/>
-            <a:lstStyle/>
-            <a:p>
-              <a:endParaRPr lang="ja-JP" altLang="en-US"/>
-            </a:p>
-          </p:txBody>
-        </p:sp>
-        <p:sp>
-          <p:nvSpPr>
-            <p:cNvPr id="36" name="フリーフォーム: 図形 35">
-              <a:extLst>
-                <a:ext uri="{FF2B5EF4-FFF2-40B4-BE49-F238E27FC236}">
-                  <a16:creationId xmlns:a16="http://schemas.microsoft.com/office/drawing/2014/main" id="{9158DC9D-86B1-7D02-63BF-E93BD21948C9}"/>
-                </a:ext>
-              </a:extLst>
-            </p:cNvPr>
-            <p:cNvSpPr/>
-            <p:nvPr/>
-          </p:nvSpPr>
-          <p:spPr>
-            <a:xfrm>
-              <a:off x="6714731" y="2692616"/>
-              <a:ext cx="144000" cy="144000"/>
-            </a:xfrm>
-            <a:custGeom>
-              <a:avLst/>
-              <a:gdLst>
-                <a:gd name="connsiteX0" fmla="*/ 144158 w 144000"/>
-                <a:gd name="connsiteY0" fmla="*/ 71805 h 144000"/>
-                <a:gd name="connsiteX1" fmla="*/ 72158 w 144000"/>
-                <a:gd name="connsiteY1" fmla="*/ 143805 h 144000"/>
-                <a:gd name="connsiteX2" fmla="*/ 158 w 144000"/>
-                <a:gd name="connsiteY2" fmla="*/ 71805 h 144000"/>
-                <a:gd name="connsiteX3" fmla="*/ 72158 w 144000"/>
-                <a:gd name="connsiteY3" fmla="*/ -195 h 144000"/>
-                <a:gd name="connsiteX4" fmla="*/ 144158 w 144000"/>
-                <a:gd name="connsiteY4" fmla="*/ 71805 h 144000"/>
-              </a:gdLst>
-              <a:ahLst/>
-              <a:cxnLst>
-                <a:cxn ang="0">
-                  <a:pos x="connsiteX0" y="connsiteY0"/>
-                </a:cxn>
-                <a:cxn ang="0">
-                  <a:pos x="connsiteX1" y="connsiteY1"/>
-                </a:cxn>
-                <a:cxn ang="0">
-                  <a:pos x="connsiteX2" y="connsiteY2"/>
-                </a:cxn>
-                <a:cxn ang="0">
-                  <a:pos x="connsiteX3" y="connsiteY3"/>
-                </a:cxn>
-                <a:cxn ang="0">
-                  <a:pos x="connsiteX4" y="connsiteY4"/>
-                </a:cxn>
-              </a:cxnLst>
-              <a:rect l="l" t="t" r="r" b="b"/>
-              <a:pathLst>
-                <a:path w="144000" h="144000">
-                  <a:moveTo>
-                    <a:pt x="144158" y="71805"/>
-                  </a:moveTo>
-                  <a:cubicBezTo>
-                    <a:pt x="144158" y="111570"/>
-                    <a:pt x="111922" y="143805"/>
-                    <a:pt x="72158" y="143805"/>
-                  </a:cubicBezTo>
-                  <a:cubicBezTo>
-                    <a:pt x="32393" y="143805"/>
-                    <a:pt x="158" y="111570"/>
-                    <a:pt x="158" y="71805"/>
-                  </a:cubicBezTo>
-                  <a:cubicBezTo>
-                    <a:pt x="158" y="32041"/>
-                    <a:pt x="32393" y="-195"/>
-                    <a:pt x="72158" y="-195"/>
-                  </a:cubicBezTo>
-                  <a:cubicBezTo>
-                    <a:pt x="111922" y="-195"/>
-                    <a:pt x="144158" y="32041"/>
-                    <a:pt x="144158" y="71805"/>
-                  </a:cubicBezTo>
-                  <a:close/>
-                </a:path>
-              </a:pathLst>
-            </a:custGeom>
-            <a:noFill/>
-            <a:ln w="3602" cap="sq">
-              <a:solidFill>
-                <a:srgbClr val="000000"/>
-              </a:solidFill>
-              <a:prstDash val="solid"/>
-              <a:miter/>
-            </a:ln>
-          </p:spPr>
-          <p:txBody>
-            <a:bodyPr rtlCol="0" anchor="ctr"/>
-            <a:lstStyle/>
-            <a:p>
-              <a:endParaRPr lang="ja-JP" altLang="en-US"/>
-            </a:p>
-          </p:txBody>
-        </p:sp>
-      </p:grpSp>
-      <p:grpSp>
-        <p:nvGrpSpPr>
-          <p:cNvPr id="37" name="グラフィックス 4">
-            <a:extLst>
-              <a:ext uri="{FF2B5EF4-FFF2-40B4-BE49-F238E27FC236}">
-                <a16:creationId xmlns:a16="http://schemas.microsoft.com/office/drawing/2014/main" id="{1B6B0C17-208C-EFE4-9D9F-D8E5717D8B7A}"/>
-              </a:ext>
-            </a:extLst>
-          </p:cNvPr>
-          <p:cNvGrpSpPr/>
-          <p:nvPr/>
-        </p:nvGrpSpPr>
-        <p:grpSpPr>
-          <a:xfrm>
-            <a:off x="3988013" y="3942609"/>
-            <a:ext cx="126004" cy="187199"/>
-            <a:chOff x="3988013" y="3942609"/>
-            <a:chExt cx="126004" cy="187199"/>
-          </a:xfrm>
-        </p:grpSpPr>
-        <p:sp>
-          <p:nvSpPr>
-            <p:cNvPr id="38" name="フリーフォーム: 図形 37">
-              <a:extLst>
-                <a:ext uri="{FF2B5EF4-FFF2-40B4-BE49-F238E27FC236}">
-                  <a16:creationId xmlns:a16="http://schemas.microsoft.com/office/drawing/2014/main" id="{CE0F1950-B8F4-C1F7-255D-660802344AA3}"/>
-                </a:ext>
-              </a:extLst>
-            </p:cNvPr>
-            <p:cNvSpPr/>
-            <p:nvPr/>
-          </p:nvSpPr>
-          <p:spPr>
-            <a:xfrm>
-              <a:off x="4048320" y="3942609"/>
-              <a:ext cx="5396" cy="88205"/>
-            </a:xfrm>
-            <a:custGeom>
-              <a:avLst/>
-              <a:gdLst>
-                <a:gd name="connsiteX0" fmla="*/ 2643 w 5396"/>
-                <a:gd name="connsiteY0" fmla="*/ -101 h 88205"/>
-                <a:gd name="connsiteX1" fmla="*/ 1750 w 5396"/>
-                <a:gd name="connsiteY1" fmla="*/ 86299 h 88205"/>
-                <a:gd name="connsiteX2" fmla="*/ -53 w 5396"/>
-                <a:gd name="connsiteY2" fmla="*/ 86299 h 88205"/>
-                <a:gd name="connsiteX3" fmla="*/ 2643 w 5396"/>
-                <a:gd name="connsiteY3" fmla="*/ 88099 h 88205"/>
-                <a:gd name="connsiteX4" fmla="*/ 5343 w 5396"/>
-                <a:gd name="connsiteY4" fmla="*/ 86299 h 88205"/>
-                <a:gd name="connsiteX5" fmla="*/ 3536 w 5396"/>
-                <a:gd name="connsiteY5" fmla="*/ 86299 h 88205"/>
-                <a:gd name="connsiteX6" fmla="*/ 2661 w 5396"/>
-                <a:gd name="connsiteY6" fmla="*/ -65 h 88205"/>
-              </a:gdLst>
-              <a:ahLst/>
-              <a:cxnLst>
-                <a:cxn ang="0">
-                  <a:pos x="connsiteX0" y="connsiteY0"/>
-                </a:cxn>
-                <a:cxn ang="0">
-                  <a:pos x="connsiteX1" y="connsiteY1"/>
-                </a:cxn>
-                <a:cxn ang="0">
-                  <a:pos x="connsiteX2" y="connsiteY2"/>
-                </a:cxn>
-                <a:cxn ang="0">
-                  <a:pos x="connsiteX3" y="connsiteY3"/>
-                </a:cxn>
-                <a:cxn ang="0">
-                  <a:pos x="connsiteX4" y="connsiteY4"/>
-                </a:cxn>
-                <a:cxn ang="0">
-                  <a:pos x="connsiteX5" y="connsiteY5"/>
-                </a:cxn>
-                <a:cxn ang="0">
-                  <a:pos x="connsiteX6" y="connsiteY6"/>
-                </a:cxn>
-              </a:cxnLst>
-              <a:rect l="l" t="t" r="r" b="b"/>
-              <a:pathLst>
-                <a:path w="5396" h="88205">
-                  <a:moveTo>
-                    <a:pt x="2643" y="-101"/>
-                  </a:moveTo>
-                  <a:cubicBezTo>
-                    <a:pt x="2546" y="224"/>
-                    <a:pt x="1750" y="5299"/>
-                    <a:pt x="1750" y="86299"/>
-                  </a:cubicBezTo>
-                  <a:lnTo>
-                    <a:pt x="-53" y="86299"/>
-                  </a:lnTo>
-                  <a:cubicBezTo>
-                    <a:pt x="40" y="87631"/>
-                    <a:pt x="1498" y="88136"/>
-                    <a:pt x="2643" y="88099"/>
-                  </a:cubicBezTo>
-                  <a:cubicBezTo>
-                    <a:pt x="3791" y="88171"/>
-                    <a:pt x="5203" y="87595"/>
-                    <a:pt x="5343" y="86299"/>
-                  </a:cubicBezTo>
-                  <a:lnTo>
-                    <a:pt x="3536" y="86299"/>
-                  </a:lnTo>
-                  <a:cubicBezTo>
-                    <a:pt x="3536" y="5264"/>
-                    <a:pt x="2762" y="224"/>
-                    <a:pt x="2661" y="-65"/>
-                  </a:cubicBezTo>
-                  <a:close/>
-                </a:path>
-              </a:pathLst>
-            </a:custGeom>
-            <a:noFill/>
-            <a:ln w="3602" cap="sq">
-              <a:solidFill>
-                <a:srgbClr val="000000"/>
-              </a:solidFill>
-              <a:prstDash val="solid"/>
-              <a:miter/>
-            </a:ln>
-          </p:spPr>
-          <p:txBody>
-            <a:bodyPr rtlCol="0" anchor="ctr"/>
-            <a:lstStyle/>
-            <a:p>
-              <a:endParaRPr lang="ja-JP" altLang="en-US"/>
-            </a:p>
-          </p:txBody>
-        </p:sp>
-        <p:sp>
-          <p:nvSpPr>
-            <p:cNvPr id="39" name="フリーフォーム: 図形 38">
-              <a:extLst>
-                <a:ext uri="{FF2B5EF4-FFF2-40B4-BE49-F238E27FC236}">
-                  <a16:creationId xmlns:a16="http://schemas.microsoft.com/office/drawing/2014/main" id="{E808804E-9FE1-8DCF-8CD7-27D3E97980B5}"/>
-                </a:ext>
-              </a:extLst>
-            </p:cNvPr>
-            <p:cNvSpPr/>
-            <p:nvPr/>
-          </p:nvSpPr>
-          <p:spPr>
-            <a:xfrm>
-              <a:off x="3988013" y="4000208"/>
-              <a:ext cx="126000" cy="28800"/>
-            </a:xfrm>
-            <a:custGeom>
-              <a:avLst/>
-              <a:gdLst>
-                <a:gd name="connsiteX0" fmla="*/ 12557 w 126000"/>
-                <a:gd name="connsiteY0" fmla="*/ -98 h 28800"/>
-                <a:gd name="connsiteX1" fmla="*/ 10754 w 126000"/>
-                <a:gd name="connsiteY1" fmla="*/ 7102 h 28800"/>
-                <a:gd name="connsiteX2" fmla="*/ 8950 w 126000"/>
-                <a:gd name="connsiteY2" fmla="*/ 7102 h 28800"/>
-                <a:gd name="connsiteX3" fmla="*/ 8950 w 126000"/>
-                <a:gd name="connsiteY3" fmla="*/ 10702 h 28800"/>
-                <a:gd name="connsiteX4" fmla="*/ 12557 w 126000"/>
-                <a:gd name="connsiteY4" fmla="*/ 10702 h 28800"/>
-                <a:gd name="connsiteX5" fmla="*/ 12557 w 126000"/>
-                <a:gd name="connsiteY5" fmla="*/ 21502 h 28800"/>
-                <a:gd name="connsiteX6" fmla="*/ -53 w 126000"/>
-                <a:gd name="connsiteY6" fmla="*/ 21502 h 28800"/>
-                <a:gd name="connsiteX7" fmla="*/ -53 w 126000"/>
-                <a:gd name="connsiteY7" fmla="*/ 28702 h 28800"/>
-                <a:gd name="connsiteX8" fmla="*/ 125947 w 126000"/>
-                <a:gd name="connsiteY8" fmla="*/ 28702 h 28800"/>
-                <a:gd name="connsiteX9" fmla="*/ 125947 w 126000"/>
-                <a:gd name="connsiteY9" fmla="*/ 21502 h 28800"/>
-                <a:gd name="connsiteX10" fmla="*/ 113354 w 126000"/>
-                <a:gd name="connsiteY10" fmla="*/ 21502 h 28800"/>
-                <a:gd name="connsiteX11" fmla="*/ 113354 w 126000"/>
-                <a:gd name="connsiteY11" fmla="*/ 10702 h 28800"/>
-                <a:gd name="connsiteX12" fmla="*/ 116943 w 126000"/>
-                <a:gd name="connsiteY12" fmla="*/ 10702 h 28800"/>
-                <a:gd name="connsiteX13" fmla="*/ 116943 w 126000"/>
-                <a:gd name="connsiteY13" fmla="*/ 7102 h 28800"/>
-                <a:gd name="connsiteX14" fmla="*/ 115157 w 126000"/>
-                <a:gd name="connsiteY14" fmla="*/ 7102 h 28800"/>
-                <a:gd name="connsiteX15" fmla="*/ 113354 w 126000"/>
-                <a:gd name="connsiteY15" fmla="*/ -98 h 28800"/>
-              </a:gdLst>
-              <a:ahLst/>
-              <a:cxnLst>
-                <a:cxn ang="0">
-                  <a:pos x="connsiteX0" y="connsiteY0"/>
-                </a:cxn>
-                <a:cxn ang="0">
-                  <a:pos x="connsiteX1" y="connsiteY1"/>
-                </a:cxn>
-                <a:cxn ang="0">
-                  <a:pos x="connsiteX2" y="connsiteY2"/>
-                </a:cxn>
-                <a:cxn ang="0">
-                  <a:pos x="connsiteX3" y="connsiteY3"/>
-                </a:cxn>
-                <a:cxn ang="0">
-                  <a:pos x="connsiteX4" y="connsiteY4"/>
-                </a:cxn>
-                <a:cxn ang="0">
-                  <a:pos x="connsiteX5" y="connsiteY5"/>
-                </a:cxn>
-                <a:cxn ang="0">
-                  <a:pos x="connsiteX6" y="connsiteY6"/>
-                </a:cxn>
-                <a:cxn ang="0">
-                  <a:pos x="connsiteX7" y="connsiteY7"/>
-                </a:cxn>
-                <a:cxn ang="0">
-                  <a:pos x="connsiteX8" y="connsiteY8"/>
-                </a:cxn>
-                <a:cxn ang="0">
-                  <a:pos x="connsiteX9" y="connsiteY9"/>
-                </a:cxn>
-                <a:cxn ang="0">
-                  <a:pos x="connsiteX10" y="connsiteY10"/>
-                </a:cxn>
-                <a:cxn ang="0">
-                  <a:pos x="connsiteX11" y="connsiteY11"/>
-                </a:cxn>
-                <a:cxn ang="0">
-                  <a:pos x="connsiteX12" y="connsiteY12"/>
-                </a:cxn>
-                <a:cxn ang="0">
-                  <a:pos x="connsiteX13" y="connsiteY13"/>
-                </a:cxn>
-                <a:cxn ang="0">
-                  <a:pos x="connsiteX14" y="connsiteY14"/>
-                </a:cxn>
-                <a:cxn ang="0">
-                  <a:pos x="connsiteX15" y="connsiteY15"/>
-                </a:cxn>
-              </a:cxnLst>
-              <a:rect l="l" t="t" r="r" b="b"/>
-              <a:pathLst>
-                <a:path w="126000" h="28800">
-                  <a:moveTo>
-                    <a:pt x="12557" y="-98"/>
-                  </a:moveTo>
-                  <a:lnTo>
-                    <a:pt x="10754" y="7102"/>
-                  </a:lnTo>
-                  <a:lnTo>
-                    <a:pt x="8950" y="7102"/>
-                  </a:lnTo>
-                  <a:lnTo>
-                    <a:pt x="8950" y="10702"/>
-                  </a:lnTo>
-                  <a:lnTo>
-                    <a:pt x="12557" y="10702"/>
-                  </a:lnTo>
-                  <a:lnTo>
-                    <a:pt x="12557" y="21502"/>
-                  </a:lnTo>
-                  <a:lnTo>
-                    <a:pt x="-53" y="21502"/>
-                  </a:lnTo>
-                  <a:lnTo>
-                    <a:pt x="-53" y="28702"/>
-                  </a:lnTo>
-                  <a:lnTo>
-                    <a:pt x="125947" y="28702"/>
-                  </a:lnTo>
-                  <a:lnTo>
-                    <a:pt x="125947" y="21502"/>
-                  </a:lnTo>
-                  <a:lnTo>
-                    <a:pt x="113354" y="21502"/>
-                  </a:lnTo>
-                  <a:lnTo>
-                    <a:pt x="113354" y="10702"/>
-                  </a:lnTo>
-                  <a:lnTo>
-                    <a:pt x="116943" y="10702"/>
-                  </a:lnTo>
-                  <a:lnTo>
-                    <a:pt x="116943" y="7102"/>
-                  </a:lnTo>
-                  <a:lnTo>
-                    <a:pt x="115157" y="7102"/>
-                  </a:lnTo>
-                  <a:lnTo>
-                    <a:pt x="113354" y="-98"/>
-                  </a:lnTo>
-                  <a:close/>
-                </a:path>
-              </a:pathLst>
-            </a:custGeom>
-            <a:solidFill>
-              <a:srgbClr val="FFFFFF"/>
-            </a:solidFill>
-            <a:ln w="3602" cap="sq">
-              <a:solidFill>
-                <a:srgbClr val="000000"/>
-              </a:solidFill>
-              <a:prstDash val="solid"/>
-              <a:miter/>
-            </a:ln>
-          </p:spPr>
-          <p:txBody>
-            <a:bodyPr rtlCol="0" anchor="ctr"/>
-            <a:lstStyle/>
-            <a:p>
-              <a:endParaRPr lang="ja-JP" altLang="en-US"/>
-            </a:p>
-          </p:txBody>
-        </p:sp>
-        <p:sp>
-          <p:nvSpPr>
-            <p:cNvPr id="40" name="フリーフォーム: 図形 39">
-              <a:extLst>
-                <a:ext uri="{FF2B5EF4-FFF2-40B4-BE49-F238E27FC236}">
-                  <a16:creationId xmlns:a16="http://schemas.microsoft.com/office/drawing/2014/main" id="{94E9125C-DDD1-6D8B-DCB9-A6D5CD1E299B}"/>
-                </a:ext>
-              </a:extLst>
-            </p:cNvPr>
-            <p:cNvSpPr/>
-            <p:nvPr/>
-          </p:nvSpPr>
-          <p:spPr>
-            <a:xfrm>
-              <a:off x="4000624" y="3978609"/>
-              <a:ext cx="100796" cy="21599"/>
-            </a:xfrm>
-            <a:custGeom>
-              <a:avLst/>
-              <a:gdLst>
-                <a:gd name="connsiteX0" fmla="*/ 19743 w 100796"/>
-                <a:gd name="connsiteY0" fmla="*/ -100 h 21599"/>
-                <a:gd name="connsiteX1" fmla="*/ 16431 w 100796"/>
-                <a:gd name="connsiteY1" fmla="*/ 19700 h 21599"/>
-                <a:gd name="connsiteX2" fmla="*/ -53 w 100796"/>
-                <a:gd name="connsiteY2" fmla="*/ 19700 h 21599"/>
-                <a:gd name="connsiteX3" fmla="*/ -53 w 100796"/>
-                <a:gd name="connsiteY3" fmla="*/ 21499 h 21599"/>
-                <a:gd name="connsiteX4" fmla="*/ 80947 w 100796"/>
-                <a:gd name="connsiteY4" fmla="*/ 21499 h 21599"/>
-                <a:gd name="connsiteX5" fmla="*/ 84539 w 100796"/>
-                <a:gd name="connsiteY5" fmla="*/ 21499 h 21599"/>
-                <a:gd name="connsiteX6" fmla="*/ 100743 w 100796"/>
-                <a:gd name="connsiteY6" fmla="*/ 21499 h 21599"/>
-                <a:gd name="connsiteX7" fmla="*/ 100743 w 100796"/>
-                <a:gd name="connsiteY7" fmla="*/ 19700 h 21599"/>
-                <a:gd name="connsiteX8" fmla="*/ 84241 w 100796"/>
-                <a:gd name="connsiteY8" fmla="*/ 19700 h 21599"/>
-                <a:gd name="connsiteX9" fmla="*/ 80947 w 100796"/>
-                <a:gd name="connsiteY9" fmla="*/ -100 h 21599"/>
-              </a:gdLst>
-              <a:ahLst/>
-              <a:cxnLst>
-                <a:cxn ang="0">
-                  <a:pos x="connsiteX0" y="connsiteY0"/>
-                </a:cxn>
-                <a:cxn ang="0">
-                  <a:pos x="connsiteX1" y="connsiteY1"/>
-                </a:cxn>
-                <a:cxn ang="0">
-                  <a:pos x="connsiteX2" y="connsiteY2"/>
-                </a:cxn>
-                <a:cxn ang="0">
-                  <a:pos x="connsiteX3" y="connsiteY3"/>
-                </a:cxn>
-                <a:cxn ang="0">
-                  <a:pos x="connsiteX4" y="connsiteY4"/>
-                </a:cxn>
-                <a:cxn ang="0">
-                  <a:pos x="connsiteX5" y="connsiteY5"/>
-                </a:cxn>
-                <a:cxn ang="0">
-                  <a:pos x="connsiteX6" y="connsiteY6"/>
-                </a:cxn>
-                <a:cxn ang="0">
-                  <a:pos x="connsiteX7" y="connsiteY7"/>
-                </a:cxn>
-                <a:cxn ang="0">
-                  <a:pos x="connsiteX8" y="connsiteY8"/>
-                </a:cxn>
-                <a:cxn ang="0">
-                  <a:pos x="connsiteX9" y="connsiteY9"/>
-                </a:cxn>
-              </a:cxnLst>
-              <a:rect l="l" t="t" r="r" b="b"/>
-              <a:pathLst>
-                <a:path w="100796" h="21599">
-                  <a:moveTo>
-                    <a:pt x="19743" y="-100"/>
-                  </a:moveTo>
-                  <a:lnTo>
-                    <a:pt x="16431" y="19700"/>
-                  </a:lnTo>
-                  <a:lnTo>
-                    <a:pt x="-53" y="19700"/>
-                  </a:lnTo>
-                  <a:lnTo>
-                    <a:pt x="-53" y="21499"/>
-                  </a:lnTo>
-                  <a:lnTo>
-                    <a:pt x="80947" y="21499"/>
-                  </a:lnTo>
-                  <a:lnTo>
-                    <a:pt x="84539" y="21499"/>
-                  </a:lnTo>
-                  <a:lnTo>
-                    <a:pt x="100743" y="21499"/>
-                  </a:lnTo>
-                  <a:lnTo>
-                    <a:pt x="100743" y="19700"/>
-                  </a:lnTo>
-                  <a:lnTo>
-                    <a:pt x="84241" y="19700"/>
-                  </a:lnTo>
-                  <a:lnTo>
-                    <a:pt x="80947" y="-100"/>
-                  </a:lnTo>
-                  <a:close/>
-                </a:path>
-              </a:pathLst>
-            </a:custGeom>
-            <a:solidFill>
-              <a:srgbClr val="FFFFFF"/>
-            </a:solidFill>
-            <a:ln w="3602" cap="sq">
-              <a:solidFill>
-                <a:srgbClr val="000000"/>
-              </a:solidFill>
-              <a:prstDash val="solid"/>
-              <a:miter/>
-            </a:ln>
-          </p:spPr>
-          <p:txBody>
-            <a:bodyPr rtlCol="0" anchor="ctr"/>
-            <a:lstStyle/>
-            <a:p>
-              <a:endParaRPr lang="ja-JP" altLang="en-US"/>
-            </a:p>
-          </p:txBody>
-        </p:sp>
-        <p:sp>
-          <p:nvSpPr>
-            <p:cNvPr id="41" name="フリーフォーム: 図形 40">
-              <a:extLst>
-                <a:ext uri="{FF2B5EF4-FFF2-40B4-BE49-F238E27FC236}">
-                  <a16:creationId xmlns:a16="http://schemas.microsoft.com/office/drawing/2014/main" id="{2F5E8004-5314-587C-6668-3218B687AA50}"/>
-                </a:ext>
-              </a:extLst>
-            </p:cNvPr>
-            <p:cNvSpPr/>
-            <p:nvPr/>
-          </p:nvSpPr>
-          <p:spPr>
-            <a:xfrm>
-              <a:off x="3988017" y="4029008"/>
-              <a:ext cx="126000" cy="100800"/>
-            </a:xfrm>
-            <a:custGeom>
-              <a:avLst/>
-              <a:gdLst>
-                <a:gd name="connsiteX0" fmla="*/ -53 w 126000"/>
-                <a:gd name="connsiteY0" fmla="*/ 100707 h 100800"/>
-                <a:gd name="connsiteX1" fmla="*/ 125947 w 126000"/>
-                <a:gd name="connsiteY1" fmla="*/ 100707 h 100800"/>
-                <a:gd name="connsiteX2" fmla="*/ 125947 w 126000"/>
-                <a:gd name="connsiteY2" fmla="*/ -93 h 100800"/>
-                <a:gd name="connsiteX3" fmla="*/ -53 w 126000"/>
-                <a:gd name="connsiteY3" fmla="*/ -93 h 100800"/>
-              </a:gdLst>
-              <a:ahLst/>
-              <a:cxnLst>
-                <a:cxn ang="0">
-                  <a:pos x="connsiteX0" y="connsiteY0"/>
-                </a:cxn>
-                <a:cxn ang="0">
-                  <a:pos x="connsiteX1" y="connsiteY1"/>
-                </a:cxn>
-                <a:cxn ang="0">
-                  <a:pos x="connsiteX2" y="connsiteY2"/>
-                </a:cxn>
-                <a:cxn ang="0">
-                  <a:pos x="connsiteX3" y="connsiteY3"/>
-                </a:cxn>
-              </a:cxnLst>
-              <a:rect l="l" t="t" r="r" b="b"/>
-              <a:pathLst>
-                <a:path w="126000" h="100800">
-                  <a:moveTo>
-                    <a:pt x="-53" y="100707"/>
-                  </a:moveTo>
-                  <a:lnTo>
-                    <a:pt x="125947" y="100707"/>
-                  </a:lnTo>
-                  <a:lnTo>
-                    <a:pt x="125947" y="-93"/>
-                  </a:lnTo>
-                  <a:lnTo>
-                    <a:pt x="-53" y="-93"/>
-                  </a:lnTo>
-                  <a:close/>
-                </a:path>
-              </a:pathLst>
-            </a:custGeom>
-            <a:solidFill>
-              <a:srgbClr val="FFFFFF"/>
-            </a:solidFill>
-            <a:ln w="3602" cap="sq">
-              <a:solidFill>
-                <a:srgbClr val="000000"/>
-              </a:solidFill>
-              <a:prstDash val="solid"/>
-              <a:miter/>
-            </a:ln>
-          </p:spPr>
-          <p:txBody>
-            <a:bodyPr rtlCol="0" anchor="ctr"/>
-            <a:lstStyle/>
-            <a:p>
-              <a:endParaRPr lang="ja-JP" altLang="en-US"/>
-            </a:p>
-          </p:txBody>
-        </p:sp>
-      </p:grpSp>
+      </p:pic>
     </p:spTree>
     <p:extLst>
       <p:ext uri="{BB962C8B-B14F-4D97-AF65-F5344CB8AC3E}">

--- a/資料.pptx
+++ b/資料.pptx
@@ -540,7 +540,7 @@
           <a:bodyPr/>
           <a:lstStyle/>
           <a:p>
-            <a:endParaRPr kumimoji="1" lang="ja-JP" altLang="en-US"/>
+            <a:endParaRPr kumimoji="1" lang="ja-JP" altLang="en-US" dirty="0"/>
           </a:p>
         </p:txBody>
       </p:sp>
@@ -4082,42 +4082,730 @@
           <a:chExt cx="0" cy="0"/>
         </a:xfrm>
       </p:grpSpPr>
-      <p:pic>
-        <p:nvPicPr>
-          <p:cNvPr id="43" name="グラフィックス 42">
-            <a:extLst>
-              <a:ext uri="{FF2B5EF4-FFF2-40B4-BE49-F238E27FC236}">
-                <a16:creationId xmlns:a16="http://schemas.microsoft.com/office/drawing/2014/main" id="{D0A1DB65-2E31-B77F-0097-D340A13A2136}"/>
-              </a:ext>
-            </a:extLst>
-          </p:cNvPr>
-          <p:cNvPicPr>
-            <a:picLocks noChangeAspect="1"/>
-          </p:cNvPicPr>
+      <p:grpSp>
+        <p:nvGrpSpPr>
+          <p:cNvPr id="46" name="グラフィックス 44">
+            <a:extLst>
+              <a:ext uri="{FF2B5EF4-FFF2-40B4-BE49-F238E27FC236}">
+                <a16:creationId xmlns:a16="http://schemas.microsoft.com/office/drawing/2014/main" id="{6236FC02-A5DC-B6C4-25A7-3F37C7D093AC}"/>
+              </a:ext>
+            </a:extLst>
+          </p:cNvPr>
+          <p:cNvGrpSpPr/>
           <p:nvPr/>
-        </p:nvPicPr>
-        <p:blipFill>
-          <a:blip>
-            <a:extLst>
-              <a:ext uri="{96DAC541-7B7A-43D3-8B79-37D633B846F1}">
-                <asvg:svgBlip xmlns:asvg="http://schemas.microsoft.com/office/drawing/2016/SVG/main" r:embed="rId3"/>
-              </a:ext>
-            </a:extLst>
-          </a:blip>
-          <a:stretch>
-            <a:fillRect/>
-          </a:stretch>
-        </p:blipFill>
-        <p:spPr>
+        </p:nvGrpSpPr>
+        <p:grpSpPr>
           <a:xfrm>
-            <a:off x="5105400" y="3319462"/>
-            <a:ext cx="1981200" cy="219075"/>
+            <a:off x="5105390" y="3338535"/>
+            <a:ext cx="1981873" cy="180000"/>
+            <a:chOff x="5105390" y="3338535"/>
+            <a:chExt cx="1981873" cy="180000"/>
           </a:xfrm>
-          <a:prstGeom prst="rect">
-            <a:avLst/>
-          </a:prstGeom>
-        </p:spPr>
-      </p:pic>
+          <a:solidFill>
+            <a:srgbClr val="000000">
+              <a:alpha val="50000"/>
+            </a:srgbClr>
+          </a:solidFill>
+        </p:grpSpPr>
+        <p:sp>
+          <p:nvSpPr>
+            <p:cNvPr id="47" name="フリーフォーム: 図形 46">
+              <a:extLst>
+                <a:ext uri="{FF2B5EF4-FFF2-40B4-BE49-F238E27FC236}">
+                  <a16:creationId xmlns:a16="http://schemas.microsoft.com/office/drawing/2014/main" id="{44D05CF4-2F30-FF5B-800E-E164C71E1700}"/>
+                </a:ext>
+              </a:extLst>
+            </p:cNvPr>
+            <p:cNvSpPr/>
+            <p:nvPr/>
+          </p:nvSpPr>
+          <p:spPr>
+            <a:xfrm>
+              <a:off x="5105390" y="3356139"/>
+              <a:ext cx="1981873" cy="144000"/>
+            </a:xfrm>
+            <a:custGeom>
+              <a:avLst/>
+              <a:gdLst>
+                <a:gd name="csX0" fmla="*/ -73 w 1981873"/>
+                <a:gd name="csY0" fmla="*/ -231 h 144000"/>
+                <a:gd name="csX1" fmla="*/ -73 w 1981873"/>
+                <a:gd name="csY1" fmla="*/ 2901 h 144000"/>
+                <a:gd name="csX2" fmla="*/ 1981801 w 1981873"/>
+                <a:gd name="csY2" fmla="*/ 2901 h 144000"/>
+                <a:gd name="csX3" fmla="*/ 1981801 w 1981873"/>
+                <a:gd name="csY3" fmla="*/ -231 h 144000"/>
+                <a:gd name="csX4" fmla="*/ -73 w 1981873"/>
+                <a:gd name="csY4" fmla="*/ 139737 h 144000"/>
+                <a:gd name="csX5" fmla="*/ -73 w 1981873"/>
+                <a:gd name="csY5" fmla="*/ 143769 h 144000"/>
+                <a:gd name="csX6" fmla="*/ 1981801 w 1981873"/>
+                <a:gd name="csY6" fmla="*/ 143769 h 144000"/>
+                <a:gd name="csX7" fmla="*/ 1981801 w 1981873"/>
+                <a:gd name="csY7" fmla="*/ 139737 h 144000"/>
+              </a:gdLst>
+              <a:ahLst/>
+              <a:cxnLst>
+                <a:cxn ang="0">
+                  <a:pos x="csX0" y="csY0"/>
+                </a:cxn>
+                <a:cxn ang="0">
+                  <a:pos x="csX1" y="csY1"/>
+                </a:cxn>
+                <a:cxn ang="0">
+                  <a:pos x="csX2" y="csY2"/>
+                </a:cxn>
+                <a:cxn ang="0">
+                  <a:pos x="csX3" y="csY3"/>
+                </a:cxn>
+                <a:cxn ang="0">
+                  <a:pos x="csX4" y="csY4"/>
+                </a:cxn>
+                <a:cxn ang="0">
+                  <a:pos x="csX5" y="csY5"/>
+                </a:cxn>
+                <a:cxn ang="0">
+                  <a:pos x="csX6" y="csY6"/>
+                </a:cxn>
+                <a:cxn ang="0">
+                  <a:pos x="csX7" y="csY7"/>
+                </a:cxn>
+              </a:cxnLst>
+              <a:rect l="l" t="t" r="r" b="b"/>
+              <a:pathLst>
+                <a:path w="1981873" h="144000">
+                  <a:moveTo>
+                    <a:pt x="-73" y="-231"/>
+                  </a:moveTo>
+                  <a:lnTo>
+                    <a:pt x="-73" y="2901"/>
+                  </a:lnTo>
+                  <a:lnTo>
+                    <a:pt x="1981801" y="2901"/>
+                  </a:lnTo>
+                  <a:lnTo>
+                    <a:pt x="1981801" y="-231"/>
+                  </a:lnTo>
+                  <a:close/>
+                  <a:moveTo>
+                    <a:pt x="-73" y="139737"/>
+                  </a:moveTo>
+                  <a:lnTo>
+                    <a:pt x="-73" y="143769"/>
+                  </a:lnTo>
+                  <a:lnTo>
+                    <a:pt x="1981801" y="143769"/>
+                  </a:lnTo>
+                  <a:lnTo>
+                    <a:pt x="1981801" y="139737"/>
+                  </a:lnTo>
+                  <a:close/>
+                </a:path>
+              </a:pathLst>
+            </a:custGeom>
+            <a:solidFill>
+              <a:srgbClr val="000000">
+                <a:alpha val="50000"/>
+              </a:srgbClr>
+            </a:solidFill>
+            <a:ln w="2646" cap="sq">
+              <a:noFill/>
+              <a:prstDash val="solid"/>
+              <a:miter/>
+            </a:ln>
+          </p:spPr>
+          <p:txBody>
+            <a:bodyPr/>
+            <a:lstStyle/>
+            <a:p>
+              <a:endParaRPr lang="ja-JP" altLang="en-US"/>
+            </a:p>
+          </p:txBody>
+        </p:sp>
+        <p:sp>
+          <p:nvSpPr>
+            <p:cNvPr id="48" name="フリーフォーム: 図形 47">
+              <a:extLst>
+                <a:ext uri="{FF2B5EF4-FFF2-40B4-BE49-F238E27FC236}">
+                  <a16:creationId xmlns:a16="http://schemas.microsoft.com/office/drawing/2014/main" id="{4ED249EC-03FF-BEC1-7F5B-FABE8F6334BA}"/>
+                </a:ext>
+              </a:extLst>
+            </p:cNvPr>
+            <p:cNvSpPr/>
+            <p:nvPr/>
+          </p:nvSpPr>
+          <p:spPr>
+            <a:xfrm>
+              <a:off x="5318762" y="3399735"/>
+              <a:ext cx="385200" cy="57600"/>
+            </a:xfrm>
+            <a:custGeom>
+              <a:avLst/>
+              <a:gdLst>
+                <a:gd name="csX0" fmla="*/ -118 w 385200"/>
+                <a:gd name="csY0" fmla="*/ 57370 h 57600"/>
+                <a:gd name="csX1" fmla="*/ 385082 w 385200"/>
+                <a:gd name="csY1" fmla="*/ 57370 h 57600"/>
+                <a:gd name="csX2" fmla="*/ 385082 w 385200"/>
+                <a:gd name="csY2" fmla="*/ -231 h 57600"/>
+                <a:gd name="csX3" fmla="*/ -118 w 385200"/>
+                <a:gd name="csY3" fmla="*/ -231 h 57600"/>
+              </a:gdLst>
+              <a:ahLst/>
+              <a:cxnLst>
+                <a:cxn ang="0">
+                  <a:pos x="csX0" y="csY0"/>
+                </a:cxn>
+                <a:cxn ang="0">
+                  <a:pos x="csX1" y="csY1"/>
+                </a:cxn>
+                <a:cxn ang="0">
+                  <a:pos x="csX2" y="csY2"/>
+                </a:cxn>
+                <a:cxn ang="0">
+                  <a:pos x="csX3" y="csY3"/>
+                </a:cxn>
+              </a:cxnLst>
+              <a:rect l="l" t="t" r="r" b="b"/>
+              <a:pathLst>
+                <a:path w="385200" h="57600">
+                  <a:moveTo>
+                    <a:pt x="-118" y="57370"/>
+                  </a:moveTo>
+                  <a:lnTo>
+                    <a:pt x="385082" y="57370"/>
+                  </a:lnTo>
+                  <a:lnTo>
+                    <a:pt x="385082" y="-231"/>
+                  </a:lnTo>
+                  <a:lnTo>
+                    <a:pt x="-118" y="-231"/>
+                  </a:lnTo>
+                  <a:close/>
+                </a:path>
+              </a:pathLst>
+            </a:custGeom>
+            <a:solidFill>
+              <a:srgbClr val="000000">
+                <a:alpha val="50000"/>
+              </a:srgbClr>
+            </a:solidFill>
+            <a:ln w="3598" cap="sq">
+              <a:noFill/>
+              <a:prstDash val="solid"/>
+              <a:miter/>
+            </a:ln>
+          </p:spPr>
+          <p:txBody>
+            <a:bodyPr/>
+            <a:lstStyle/>
+            <a:p>
+              <a:endParaRPr lang="ja-JP" altLang="en-US"/>
+            </a:p>
+          </p:txBody>
+        </p:sp>
+        <p:sp>
+          <p:nvSpPr>
+            <p:cNvPr id="49" name="フリーフォーム: 図形 48">
+              <a:extLst>
+                <a:ext uri="{FF2B5EF4-FFF2-40B4-BE49-F238E27FC236}">
+                  <a16:creationId xmlns:a16="http://schemas.microsoft.com/office/drawing/2014/main" id="{7F65D828-44D4-004E-DD1A-26D00263E581}"/>
+                </a:ext>
+              </a:extLst>
+            </p:cNvPr>
+            <p:cNvSpPr/>
+            <p:nvPr/>
+          </p:nvSpPr>
+          <p:spPr>
+            <a:xfrm>
+              <a:off x="6096327" y="3338535"/>
+              <a:ext cx="3635" cy="180000"/>
+            </a:xfrm>
+            <a:custGeom>
+              <a:avLst/>
+              <a:gdLst>
+                <a:gd name="csX0" fmla="*/ -72 w 3635"/>
+                <a:gd name="csY0" fmla="*/ -231 h 180000"/>
+                <a:gd name="csX1" fmla="*/ -72 w 3635"/>
+                <a:gd name="csY1" fmla="*/ 87969 h 180000"/>
+                <a:gd name="csX2" fmla="*/ 3563 w 3635"/>
+                <a:gd name="csY2" fmla="*/ 87969 h 180000"/>
+                <a:gd name="csX3" fmla="*/ 3563 w 3635"/>
+                <a:gd name="csY3" fmla="*/ -231 h 180000"/>
+                <a:gd name="csX4" fmla="*/ -72 w 3635"/>
+                <a:gd name="csY4" fmla="*/ 91570 h 180000"/>
+                <a:gd name="csX5" fmla="*/ -72 w 3635"/>
+                <a:gd name="csY5" fmla="*/ 179769 h 180000"/>
+                <a:gd name="csX6" fmla="*/ 3563 w 3635"/>
+                <a:gd name="csY6" fmla="*/ 179769 h 180000"/>
+                <a:gd name="csX7" fmla="*/ 3563 w 3635"/>
+                <a:gd name="csY7" fmla="*/ 91570 h 180000"/>
+              </a:gdLst>
+              <a:ahLst/>
+              <a:cxnLst>
+                <a:cxn ang="0">
+                  <a:pos x="csX0" y="csY0"/>
+                </a:cxn>
+                <a:cxn ang="0">
+                  <a:pos x="csX1" y="csY1"/>
+                </a:cxn>
+                <a:cxn ang="0">
+                  <a:pos x="csX2" y="csY2"/>
+                </a:cxn>
+                <a:cxn ang="0">
+                  <a:pos x="csX3" y="csY3"/>
+                </a:cxn>
+                <a:cxn ang="0">
+                  <a:pos x="csX4" y="csY4"/>
+                </a:cxn>
+                <a:cxn ang="0">
+                  <a:pos x="csX5" y="csY5"/>
+                </a:cxn>
+                <a:cxn ang="0">
+                  <a:pos x="csX6" y="csY6"/>
+                </a:cxn>
+                <a:cxn ang="0">
+                  <a:pos x="csX7" y="csY7"/>
+                </a:cxn>
+              </a:cxnLst>
+              <a:rect l="l" t="t" r="r" b="b"/>
+              <a:pathLst>
+                <a:path w="3635" h="180000">
+                  <a:moveTo>
+                    <a:pt x="-72" y="-231"/>
+                  </a:moveTo>
+                  <a:lnTo>
+                    <a:pt x="-72" y="87969"/>
+                  </a:lnTo>
+                  <a:lnTo>
+                    <a:pt x="3563" y="87969"/>
+                  </a:lnTo>
+                  <a:lnTo>
+                    <a:pt x="3563" y="-231"/>
+                  </a:lnTo>
+                  <a:close/>
+                  <a:moveTo>
+                    <a:pt x="-72" y="91570"/>
+                  </a:moveTo>
+                  <a:lnTo>
+                    <a:pt x="-72" y="179769"/>
+                  </a:lnTo>
+                  <a:lnTo>
+                    <a:pt x="3563" y="179769"/>
+                  </a:lnTo>
+                  <a:lnTo>
+                    <a:pt x="3563" y="91570"/>
+                  </a:lnTo>
+                  <a:close/>
+                </a:path>
+              </a:pathLst>
+            </a:custGeom>
+            <a:solidFill>
+              <a:srgbClr val="000000">
+                <a:alpha val="50000"/>
+              </a:srgbClr>
+            </a:solidFill>
+            <a:ln w="2846" cap="rnd">
+              <a:noFill/>
+              <a:prstDash val="solid"/>
+              <a:round/>
+            </a:ln>
+          </p:spPr>
+          <p:txBody>
+            <a:bodyPr/>
+            <a:lstStyle/>
+            <a:p>
+              <a:endParaRPr lang="ja-JP" altLang="en-US"/>
+            </a:p>
+          </p:txBody>
+        </p:sp>
+        <p:sp>
+          <p:nvSpPr>
+            <p:cNvPr id="50" name="正方形/長方形 49">
+              <a:extLst>
+                <a:ext uri="{FF2B5EF4-FFF2-40B4-BE49-F238E27FC236}">
+                  <a16:creationId xmlns:a16="http://schemas.microsoft.com/office/drawing/2014/main" id="{4E0C8754-8D73-14E7-7DD1-1FA9794B2155}"/>
+                </a:ext>
+              </a:extLst>
+            </p:cNvPr>
+            <p:cNvSpPr/>
+            <p:nvPr/>
+          </p:nvSpPr>
+          <p:spPr>
+            <a:xfrm>
+              <a:off x="5811963" y="3338535"/>
+              <a:ext cx="288000" cy="3600"/>
+            </a:xfrm>
+            <a:prstGeom prst="rect">
+              <a:avLst/>
+            </a:prstGeom>
+            <a:solidFill>
+              <a:srgbClr val="000000">
+                <a:alpha val="50000"/>
+              </a:srgbClr>
+            </a:solidFill>
+            <a:ln w="3602" cap="rnd">
+              <a:noFill/>
+              <a:prstDash val="solid"/>
+              <a:round/>
+            </a:ln>
+          </p:spPr>
+          <p:txBody>
+            <a:bodyPr/>
+            <a:lstStyle/>
+            <a:p>
+              <a:endParaRPr lang="ja-JP" altLang="en-US"/>
+            </a:p>
+          </p:txBody>
+        </p:sp>
+        <p:sp>
+          <p:nvSpPr>
+            <p:cNvPr id="51" name="正方形/長方形 50">
+              <a:extLst>
+                <a:ext uri="{FF2B5EF4-FFF2-40B4-BE49-F238E27FC236}">
+                  <a16:creationId xmlns:a16="http://schemas.microsoft.com/office/drawing/2014/main" id="{9E8207CE-54AE-A0D0-A753-07CDD5D71C41}"/>
+                </a:ext>
+              </a:extLst>
+            </p:cNvPr>
+            <p:cNvSpPr/>
+            <p:nvPr/>
+          </p:nvSpPr>
+          <p:spPr>
+            <a:xfrm>
+              <a:off x="5811963" y="3514935"/>
+              <a:ext cx="288000" cy="3600"/>
+            </a:xfrm>
+            <a:prstGeom prst="rect">
+              <a:avLst/>
+            </a:prstGeom>
+            <a:solidFill>
+              <a:srgbClr val="000000">
+                <a:alpha val="50000"/>
+              </a:srgbClr>
+            </a:solidFill>
+            <a:ln w="3602" cap="rnd">
+              <a:noFill/>
+              <a:prstDash val="solid"/>
+              <a:round/>
+            </a:ln>
+          </p:spPr>
+          <p:txBody>
+            <a:bodyPr/>
+            <a:lstStyle/>
+            <a:p>
+              <a:endParaRPr lang="ja-JP" altLang="en-US"/>
+            </a:p>
+          </p:txBody>
+        </p:sp>
+        <p:sp>
+          <p:nvSpPr>
+            <p:cNvPr id="52" name="フリーフォーム: 図形 51">
+              <a:extLst>
+                <a:ext uri="{FF2B5EF4-FFF2-40B4-BE49-F238E27FC236}">
+                  <a16:creationId xmlns:a16="http://schemas.microsoft.com/office/drawing/2014/main" id="{7B5B9D0D-9A54-1EDD-19D1-1D91173E64E0}"/>
+                </a:ext>
+              </a:extLst>
+            </p:cNvPr>
+            <p:cNvSpPr/>
+            <p:nvPr/>
+          </p:nvSpPr>
+          <p:spPr>
+            <a:xfrm>
+              <a:off x="5811926" y="3338535"/>
+              <a:ext cx="3636" cy="180000"/>
+            </a:xfrm>
+            <a:custGeom>
+              <a:avLst/>
+              <a:gdLst>
+                <a:gd name="csX0" fmla="*/ -94 w 3636"/>
+                <a:gd name="csY0" fmla="*/ -231 h 180000"/>
+                <a:gd name="csX1" fmla="*/ -94 w 3636"/>
+                <a:gd name="csY1" fmla="*/ 87969 h 180000"/>
+                <a:gd name="csX2" fmla="*/ 3542 w 3636"/>
+                <a:gd name="csY2" fmla="*/ 87969 h 180000"/>
+                <a:gd name="csX3" fmla="*/ 3542 w 3636"/>
+                <a:gd name="csY3" fmla="*/ -231 h 180000"/>
+                <a:gd name="csX4" fmla="*/ -94 w 3636"/>
+                <a:gd name="csY4" fmla="*/ 91570 h 180000"/>
+                <a:gd name="csX5" fmla="*/ -94 w 3636"/>
+                <a:gd name="csY5" fmla="*/ 179769 h 180000"/>
+                <a:gd name="csX6" fmla="*/ 3542 w 3636"/>
+                <a:gd name="csY6" fmla="*/ 179769 h 180000"/>
+                <a:gd name="csX7" fmla="*/ 3542 w 3636"/>
+                <a:gd name="csY7" fmla="*/ 91570 h 180000"/>
+              </a:gdLst>
+              <a:ahLst/>
+              <a:cxnLst>
+                <a:cxn ang="0">
+                  <a:pos x="csX0" y="csY0"/>
+                </a:cxn>
+                <a:cxn ang="0">
+                  <a:pos x="csX1" y="csY1"/>
+                </a:cxn>
+                <a:cxn ang="0">
+                  <a:pos x="csX2" y="csY2"/>
+                </a:cxn>
+                <a:cxn ang="0">
+                  <a:pos x="csX3" y="csY3"/>
+                </a:cxn>
+                <a:cxn ang="0">
+                  <a:pos x="csX4" y="csY4"/>
+                </a:cxn>
+                <a:cxn ang="0">
+                  <a:pos x="csX5" y="csY5"/>
+                </a:cxn>
+                <a:cxn ang="0">
+                  <a:pos x="csX6" y="csY6"/>
+                </a:cxn>
+                <a:cxn ang="0">
+                  <a:pos x="csX7" y="csY7"/>
+                </a:cxn>
+              </a:cxnLst>
+              <a:rect l="l" t="t" r="r" b="b"/>
+              <a:pathLst>
+                <a:path w="3636" h="180000">
+                  <a:moveTo>
+                    <a:pt x="-94" y="-231"/>
+                  </a:moveTo>
+                  <a:lnTo>
+                    <a:pt x="-94" y="87969"/>
+                  </a:lnTo>
+                  <a:lnTo>
+                    <a:pt x="3542" y="87969"/>
+                  </a:lnTo>
+                  <a:lnTo>
+                    <a:pt x="3542" y="-231"/>
+                  </a:lnTo>
+                  <a:close/>
+                  <a:moveTo>
+                    <a:pt x="-94" y="91570"/>
+                  </a:moveTo>
+                  <a:lnTo>
+                    <a:pt x="-94" y="179769"/>
+                  </a:lnTo>
+                  <a:lnTo>
+                    <a:pt x="3542" y="179769"/>
+                  </a:lnTo>
+                  <a:lnTo>
+                    <a:pt x="3542" y="91570"/>
+                  </a:lnTo>
+                  <a:close/>
+                </a:path>
+              </a:pathLst>
+            </a:custGeom>
+            <a:solidFill>
+              <a:srgbClr val="000000">
+                <a:alpha val="50000"/>
+              </a:srgbClr>
+            </a:solidFill>
+            <a:ln w="2846" cap="rnd">
+              <a:noFill/>
+              <a:prstDash val="solid"/>
+              <a:round/>
+            </a:ln>
+          </p:spPr>
+          <p:txBody>
+            <a:bodyPr/>
+            <a:lstStyle/>
+            <a:p>
+              <a:endParaRPr lang="ja-JP" altLang="en-US"/>
+            </a:p>
+          </p:txBody>
+        </p:sp>
+        <p:sp>
+          <p:nvSpPr>
+            <p:cNvPr id="53" name="フリーフォーム: 図形 52">
+              <a:extLst>
+                <a:ext uri="{FF2B5EF4-FFF2-40B4-BE49-F238E27FC236}">
+                  <a16:creationId xmlns:a16="http://schemas.microsoft.com/office/drawing/2014/main" id="{9CDA9B06-B2F8-9309-83D4-29B2D1052A54}"/>
+                </a:ext>
+              </a:extLst>
+            </p:cNvPr>
+            <p:cNvSpPr/>
+            <p:nvPr/>
+          </p:nvSpPr>
+          <p:spPr>
+            <a:xfrm>
+              <a:off x="6333963" y="3338535"/>
+              <a:ext cx="10800" cy="180000"/>
+            </a:xfrm>
+            <a:custGeom>
+              <a:avLst/>
+              <a:gdLst>
+                <a:gd name="csX0" fmla="*/ -54 w 10800"/>
+                <a:gd name="csY0" fmla="*/ -231 h 180000"/>
+                <a:gd name="csX1" fmla="*/ -54 w 10800"/>
+                <a:gd name="csY1" fmla="*/ 87969 h 180000"/>
+                <a:gd name="csX2" fmla="*/ 10746 w 10800"/>
+                <a:gd name="csY2" fmla="*/ 87969 h 180000"/>
+                <a:gd name="csX3" fmla="*/ 10746 w 10800"/>
+                <a:gd name="csY3" fmla="*/ -231 h 180000"/>
+                <a:gd name="csX4" fmla="*/ -54 w 10800"/>
+                <a:gd name="csY4" fmla="*/ 91570 h 180000"/>
+                <a:gd name="csX5" fmla="*/ -54 w 10800"/>
+                <a:gd name="csY5" fmla="*/ 179769 h 180000"/>
+                <a:gd name="csX6" fmla="*/ 10746 w 10800"/>
+                <a:gd name="csY6" fmla="*/ 179769 h 180000"/>
+                <a:gd name="csX7" fmla="*/ 10746 w 10800"/>
+                <a:gd name="csY7" fmla="*/ 91570 h 180000"/>
+              </a:gdLst>
+              <a:ahLst/>
+              <a:cxnLst>
+                <a:cxn ang="0">
+                  <a:pos x="csX0" y="csY0"/>
+                </a:cxn>
+                <a:cxn ang="0">
+                  <a:pos x="csX1" y="csY1"/>
+                </a:cxn>
+                <a:cxn ang="0">
+                  <a:pos x="csX2" y="csY2"/>
+                </a:cxn>
+                <a:cxn ang="0">
+                  <a:pos x="csX3" y="csY3"/>
+                </a:cxn>
+                <a:cxn ang="0">
+                  <a:pos x="csX4" y="csY4"/>
+                </a:cxn>
+                <a:cxn ang="0">
+                  <a:pos x="csX5" y="csY5"/>
+                </a:cxn>
+                <a:cxn ang="0">
+                  <a:pos x="csX6" y="csY6"/>
+                </a:cxn>
+                <a:cxn ang="0">
+                  <a:pos x="csX7" y="csY7"/>
+                </a:cxn>
+              </a:cxnLst>
+              <a:rect l="l" t="t" r="r" b="b"/>
+              <a:pathLst>
+                <a:path w="10800" h="180000">
+                  <a:moveTo>
+                    <a:pt x="-54" y="-231"/>
+                  </a:moveTo>
+                  <a:lnTo>
+                    <a:pt x="-54" y="87969"/>
+                  </a:lnTo>
+                  <a:lnTo>
+                    <a:pt x="10746" y="87969"/>
+                  </a:lnTo>
+                  <a:lnTo>
+                    <a:pt x="10746" y="-231"/>
+                  </a:lnTo>
+                  <a:close/>
+                  <a:moveTo>
+                    <a:pt x="-54" y="91570"/>
+                  </a:moveTo>
+                  <a:lnTo>
+                    <a:pt x="-54" y="179769"/>
+                  </a:lnTo>
+                  <a:lnTo>
+                    <a:pt x="10746" y="179769"/>
+                  </a:lnTo>
+                  <a:lnTo>
+                    <a:pt x="10746" y="91570"/>
+                  </a:lnTo>
+                  <a:close/>
+                </a:path>
+              </a:pathLst>
+            </a:custGeom>
+            <a:solidFill>
+              <a:srgbClr val="000000">
+                <a:alpha val="50000"/>
+              </a:srgbClr>
+            </a:solidFill>
+            <a:ln w="1924" cap="sq">
+              <a:noFill/>
+              <a:prstDash val="solid"/>
+              <a:miter/>
+            </a:ln>
+          </p:spPr>
+          <p:txBody>
+            <a:bodyPr/>
+            <a:lstStyle/>
+            <a:p>
+              <a:endParaRPr lang="ja-JP" altLang="en-US"/>
+            </a:p>
+          </p:txBody>
+        </p:sp>
+        <p:sp>
+          <p:nvSpPr>
+            <p:cNvPr id="54" name="正方形/長方形 53">
+              <a:extLst>
+                <a:ext uri="{FF2B5EF4-FFF2-40B4-BE49-F238E27FC236}">
+                  <a16:creationId xmlns:a16="http://schemas.microsoft.com/office/drawing/2014/main" id="{5E84BB7A-2A64-670D-EA14-B4AD4BC7C080}"/>
+                </a:ext>
+              </a:extLst>
+            </p:cNvPr>
+            <p:cNvSpPr/>
+            <p:nvPr/>
+          </p:nvSpPr>
+          <p:spPr>
+            <a:xfrm>
+              <a:off x="5815563" y="3342135"/>
+              <a:ext cx="280781" cy="14012"/>
+            </a:xfrm>
+            <a:prstGeom prst="rect">
+              <a:avLst/>
+            </a:prstGeom>
+            <a:solidFill>
+              <a:srgbClr val="000000">
+                <a:alpha val="50000"/>
+              </a:srgbClr>
+            </a:solidFill>
+            <a:ln w="7192" cap="rnd">
+              <a:noFill/>
+              <a:prstDash val="solid"/>
+              <a:round/>
+            </a:ln>
+          </p:spPr>
+          <p:txBody>
+            <a:bodyPr/>
+            <a:lstStyle/>
+            <a:p>
+              <a:endParaRPr lang="ja-JP" altLang="en-US"/>
+            </a:p>
+          </p:txBody>
+        </p:sp>
+        <p:sp>
+          <p:nvSpPr>
+            <p:cNvPr id="55" name="正方形/長方形 54">
+              <a:extLst>
+                <a:ext uri="{FF2B5EF4-FFF2-40B4-BE49-F238E27FC236}">
+                  <a16:creationId xmlns:a16="http://schemas.microsoft.com/office/drawing/2014/main" id="{428F6482-C1ED-1A21-386A-5A18616CDD9F}"/>
+                </a:ext>
+              </a:extLst>
+            </p:cNvPr>
+            <p:cNvSpPr/>
+            <p:nvPr/>
+          </p:nvSpPr>
+          <p:spPr>
+            <a:xfrm>
+              <a:off x="5815563" y="3500139"/>
+              <a:ext cx="280781" cy="14796"/>
+            </a:xfrm>
+            <a:prstGeom prst="rect">
+              <a:avLst/>
+            </a:prstGeom>
+            <a:solidFill>
+              <a:srgbClr val="000000">
+                <a:alpha val="50000"/>
+              </a:srgbClr>
+            </a:solidFill>
+            <a:ln w="7393" cap="rnd">
+              <a:noFill/>
+              <a:prstDash val="solid"/>
+              <a:round/>
+            </a:ln>
+          </p:spPr>
+          <p:txBody>
+            <a:bodyPr/>
+            <a:lstStyle/>
+            <a:p>
+              <a:endParaRPr lang="ja-JP" altLang="en-US"/>
+            </a:p>
+          </p:txBody>
+        </p:sp>
+      </p:grpSp>
     </p:spTree>
     <p:extLst>
       <p:ext uri="{BB962C8B-B14F-4D97-AF65-F5344CB8AC3E}">
